--- a/slides/day5.pptx
+++ b/slides/day5.pptx
@@ -3329,7 +3329,7 @@
                 <a:ea typeface="NanumSquare"/>
                 <a:cs typeface="NanumSquare"/>
               </a:rPr>
-              <a:t>실행·분석 마무리 + 보고서·발표</a:t>
+              <a:t>마무리(버퍼) + 보고서·발표</a:t>
             </a:r>
           </a:p>
         </p:txBody>
@@ -3376,7 +3376,7 @@
                 <a:ea typeface="NanumGothic"/>
                 <a:cs typeface="NanumGothic"/>
               </a:rPr>
-              <a:t>실행·분석을 마무리하고, AI 에이전트로 보고서·발표자료를 만들어 발표한다</a:t>
+              <a:t>남은 부분을 보완하고, AI 에이전트로 보고서·발표자료를 만들어 발표한다</a:t>
             </a:r>
           </a:p>
         </p:txBody>
@@ -3608,7 +3608,7 @@
                 <a:ea typeface="NanumGothic"/>
                 <a:cs typeface="NanumGothic"/>
               </a:rPr>
-              <a:t>실행 및 결과 분석 (3)</a:t>
+              <a:t>버퍼 / 발표 준비</a:t>
             </a:r>
           </a:p>
         </p:txBody>
@@ -15794,7 +15794,7 @@
                 <a:ea typeface="NanumGothic"/>
                 <a:cs typeface="NanumGothic"/>
               </a:rPr>
-              <a:t>실행·분석을 마무리해 발표할 핵심 결과를 확정한다</a:t>
+              <a:t>버퍼로 미완 부분을 보완해 발표 가능한 상태로 만든다</a:t>
             </a:r>
           </a:p>
         </p:txBody>
@@ -16682,7 +16682,7 @@
                 <a:ea typeface="NanumSquare"/>
                 <a:cs typeface="NanumSquare"/>
               </a:rPr>
-              <a:t>팀별 리서치 AI Agent 실행 및 결과 분석 (3)</a:t>
+              <a:t>버퍼 / 보완 · 발표 준비</a:t>
             </a:r>
           </a:p>
         </p:txBody>
@@ -16740,7 +16740,7 @@
                 <a:ea typeface="NanumGothic"/>
                 <a:cs typeface="NanumGothic"/>
               </a:rPr>
-              <a:t>최종 실행·분석·핵심 결과 선별</a:t>
+              <a:t>미완 보완 · 발표 핵심 메시지 확정 (에이전트는 Day 4 완주)</a:t>
             </a:r>
           </a:p>
         </p:txBody>
@@ -17805,7 +17805,7 @@
                 <a:ea typeface="NanumSquare"/>
                 <a:cs typeface="NanumSquare"/>
               </a:rPr>
-              <a:t>팀별 리서치 AI Agent — 실행 및 결과 분석 (3)</a:t>
+              <a:t>버퍼 / 보완 · 발표 준비</a:t>
             </a:r>
           </a:p>
         </p:txBody>
@@ -17852,7 +17852,7 @@
                 <a:ea typeface="NanumGothic"/>
                 <a:cs typeface="NanumGothic"/>
               </a:rPr>
-              <a:t>실행·분석을 마무리하고 발표할 핵심 결과를 확정한다.</a:t>
+              <a:t>에이전트는 Day 4에 완주 — 미완 부분을 보완하고 발표를 준비한다.</a:t>
             </a:r>
           </a:p>
         </p:txBody>
@@ -18096,7 +18096,7 @@
                 <a:ea typeface="NanumSquare"/>
                 <a:cs typeface="NanumSquare"/>
               </a:rPr>
-              <a:t>팀별 리서치 AI Agent — 실행 및 결과 분석 (3)</a:t>
+              <a:t>버퍼 / 보완 · 발표 준비</a:t>
             </a:r>
           </a:p>
         </p:txBody>
@@ -18558,7 +18558,7 @@
                 <a:ea typeface="NanumGothic"/>
                 <a:cs typeface="NanumGothic"/>
               </a:rPr>
-              <a:t>마무리 목표</a:t>
+              <a:t>버퍼 운영</a:t>
             </a:r>
           </a:p>
         </p:txBody>
@@ -18742,7 +18742,7 @@
                 <a:ea typeface="NanumGothic"/>
                 <a:cs typeface="NanumGothic"/>
               </a:rPr>
-              <a:t>최종 실행·분석(실습)</a:t>
+              <a:t>보완·심화(실습)</a:t>
             </a:r>
           </a:p>
         </p:txBody>
@@ -18926,7 +18926,7 @@
                 <a:ea typeface="NanumGothic"/>
                 <a:cs typeface="NanumGothic"/>
               </a:rPr>
-              <a:t>핵심 결과 선별</a:t>
+              <a:t>발표 준비</a:t>
             </a:r>
           </a:p>
         </p:txBody>
@@ -19079,7 +19079,7 @@
                 <a:ea typeface="NanumGothic"/>
                 <a:cs typeface="NanumGothic"/>
               </a:rPr>
-              <a:t>목표</a:t>
+              <a:t>버퍼</a:t>
             </a:r>
           </a:p>
         </p:txBody>
@@ -19355,7 +19355,7 @@
                 <a:ea typeface="NanumGothic"/>
                 <a:cs typeface="NanumGothic"/>
               </a:rPr>
-              <a:t>남은 개선·실험 반영</a:t>
+              <a:t>미완성 팀 우선 보완</a:t>
             </a:r>
           </a:p>
         </p:txBody>
@@ -19402,7 +19402,7 @@
                 <a:ea typeface="NanumGothic"/>
                 <a:cs typeface="NanumGothic"/>
               </a:rPr>
-              <a:t>우선순위 높은 것부터</a:t>
+              <a:t>Day 4 못 끝낸 부분부터</a:t>
             </a:r>
           </a:p>
         </p:txBody>
@@ -19493,7 +19493,7 @@
                 <a:ea typeface="NanumGothic"/>
                 <a:cs typeface="NanumGothic"/>
               </a:rPr>
-              <a:t>결과 재현성 확인</a:t>
+              <a:t>여유 팀은 개선·심화</a:t>
             </a:r>
           </a:p>
         </p:txBody>
@@ -19540,7 +19540,7 @@
                 <a:ea typeface="NanumGothic"/>
                 <a:cs typeface="NanumGothic"/>
               </a:rPr>
-              <a:t>발표 중 깨지지 않게</a:t>
+              <a:t>추가 실험·분석 (선택)</a:t>
             </a:r>
           </a:p>
         </p:txBody>
@@ -19782,7 +19782,7 @@
                 <a:ea typeface="NanumGothic"/>
                 <a:cs typeface="NanumGothic"/>
               </a:rPr>
-              <a:t>팀별 진척에 맞게 유연하게 운영</a:t>
+              <a:t>버퍼는 팀별 진척에 맞게 유연하게</a:t>
             </a:r>
           </a:p>
         </p:txBody>
@@ -19982,7 +19982,7 @@
                 <a:ea typeface="NanumSquare"/>
                 <a:cs typeface="NanumSquare"/>
               </a:rPr>
-              <a:t>최종 실행 &amp; 분석</a:t>
+              <a:t>보완 &amp; 발표 준비</a:t>
             </a:r>
           </a:p>
         </p:txBody>
@@ -20351,7 +20351,7 @@
                 <a:ea typeface="NanumGothic"/>
                 <a:cs typeface="NanumGothic"/>
               </a:rPr>
-              <a:t>남은 개선 반영·재실행</a:t>
+              <a:t>미완 보완·재실행 → 결과 확정</a:t>
             </a:r>
           </a:p>
         </p:txBody>
@@ -20489,7 +20489,7 @@
                 <a:ea typeface="NanumGothic"/>
                 <a:cs typeface="NanumGothic"/>
               </a:rPr>
-              <a:t>최종 결과 확정</a:t>
+              <a:t>재현성 최종 확인</a:t>
             </a:r>
           </a:p>
         </p:txBody>
@@ -20627,7 +20627,7 @@
                 <a:ea typeface="NanumGothic"/>
                 <a:cs typeface="NanumGothic"/>
               </a:rPr>
-              <a:t>강점/약점·한계 정리</a:t>
+              <a:t>발표용 핵심 결과 선별</a:t>
             </a:r>
           </a:p>
         </p:txBody>
@@ -20765,7 +20765,7 @@
                 <a:ea typeface="NanumGothic"/>
                 <a:cs typeface="NanumGothic"/>
               </a:rPr>
-              <a:t>발표용 핵심 선별</a:t>
+              <a:t>발표/보고서 준비 시작</a:t>
             </a:r>
           </a:p>
         </p:txBody>
@@ -21057,7 +21057,7 @@
                 <a:ea typeface="NanumGothic"/>
                 <a:cs typeface="NanumGothic"/>
               </a:rPr>
-              <a:t>선별</a:t>
+              <a:t>발표 준비</a:t>
             </a:r>
           </a:p>
         </p:txBody>
@@ -21104,7 +21104,7 @@
                 <a:ea typeface="NanumSquare"/>
                 <a:cs typeface="NanumSquare"/>
               </a:rPr>
-              <a:t>발표할 핵심 결과 고르기</a:t>
+              <a:t>발표할 핵심 고르기</a:t>
             </a:r>
           </a:p>
         </p:txBody>

--- a/slides/day5.pptx
+++ b/slides/day5.pptx
@@ -11301,7 +11301,7 @@
                 <a:cs typeface="NanumGothic"/>
               </a:rPr>
               <a:t>발표 슬라이드 + 보고서 초안
-(템플릿 placeholder)</a:t>
+보고서 양식: examples/research-agent/output/report-template.md</a:t>
             </a:r>
           </a:p>
         </p:txBody>
@@ -13201,7 +13201,7 @@
                 <a:ea typeface="NanumGothic"/>
                 <a:cs typeface="NanumGothic"/>
               </a:rPr>
-              <a:t>[ placeholder — 강사 보강 ]</a:t>
+              <a:t>잘한 점 · 배운 점 · 다음 단계</a:t>
             </a:r>
           </a:p>
         </p:txBody>
@@ -15214,7 +15214,7 @@
                 <a:ea typeface="NanumGothic"/>
                 <a:cs typeface="NanumGothic"/>
               </a:rPr>
-              <a:t>placeholder</a:t>
+              <a:t>Claude Code 문서 · Anthropic 가이드 · oh-my-claudecode</a:t>
             </a:r>
           </a:p>
         </p:txBody>
@@ -20903,8 +20903,7 @@
                 <a:ea typeface="NanumGothic"/>
                 <a:cs typeface="NanumGothic"/>
               </a:rPr>
-              <a:t>발표 가능한 최종 결과물 + 분석 노트
-(placeholder)</a:t>
+              <a:t>발표 가능한 최종 결과물 + 분석 노트</a:t>
             </a:r>
           </a:p>
         </p:txBody>

--- a/slides/day5.pptx
+++ b/slides/day5.pptx
@@ -10610,7 +10610,7 @@
                 <a:ea typeface="NanumGothic"/>
                 <a:cs typeface="NanumGothic"/>
               </a:rPr>
-              <a:t>실습 단계 (placeholder)</a:t>
+              <a:t>실습 단계</a:t>
             </a:r>
           </a:p>
         </p:txBody>
@@ -12925,7 +12925,7 @@
                 <a:ea typeface="NanumGothic"/>
                 <a:cs typeface="NanumGothic"/>
               </a:rPr>
-              <a:t>시간·순서 placeholder</a:t>
+              <a:t>4팀 · 팀당 10분 + Q&amp;A 3분</a:t>
             </a:r>
           </a:p>
         </p:txBody>
@@ -20213,7 +20213,7 @@
                 <a:ea typeface="NanumGothic"/>
                 <a:cs typeface="NanumGothic"/>
               </a:rPr>
-              <a:t>실습 단계 (placeholder)</a:t>
+              <a:t>실습 단계</a:t>
             </a:r>
           </a:p>
         </p:txBody>

--- a/slides/day5.pptx
+++ b/slides/day5.pptx
@@ -3329,7 +3329,7 @@
                 <a:ea typeface="NanumSquare"/>
                 <a:cs typeface="NanumSquare"/>
               </a:rPr>
-              <a:t>마무리(버퍼) + 보고서·발표</a:t>
+              <a:t>마무리(버퍼) + 가설 제안서·발표</a:t>
             </a:r>
           </a:p>
         </p:txBody>
@@ -3376,7 +3376,7 @@
                 <a:ea typeface="NanumGothic"/>
                 <a:cs typeface="NanumGothic"/>
               </a:rPr>
-              <a:t>남은 부분을 보완하고, AI 에이전트로 보고서·발표자료를 만들어 발표한다</a:t>
+              <a:t>남은 부분을 보완하고, AI 에이전트로 가설 제안서·발표자료를 만들어 발표한다</a:t>
             </a:r>
           </a:p>
         </p:txBody>
@@ -3793,7 +3793,7 @@
                 <a:ea typeface="NanumGothic"/>
                 <a:cs typeface="NanumGothic"/>
               </a:rPr>
-              <a:t>보고서·발표자료 (AI Agent)</a:t>
+              <a:t>가설 제안서·발표자료 (AI Agent)</a:t>
             </a:r>
           </a:p>
         </p:txBody>
@@ -4178,7 +4178,7 @@
                 <a:ea typeface="NanumSquare"/>
                 <a:cs typeface="NanumSquare"/>
               </a:rPr>
-              <a:t>보고서 및 발표자료 — AI Agent 이론 및 수행</a:t>
+              <a:t>가설 제안서 및 발표자료 — AI Agent 이론 및 수행</a:t>
             </a:r>
           </a:p>
         </p:txBody>
@@ -4824,7 +4824,7 @@
                 <a:ea typeface="NanumGothic"/>
                 <a:cs typeface="NanumGothic"/>
               </a:rPr>
-              <a:t>좋은 보고서·발표의 핵심</a:t>
+              <a:t>좋은 (가설)제안·발표의 핵심</a:t>
             </a:r>
           </a:p>
         </p:txBody>
@@ -5560,7 +5560,7 @@
                 <a:ea typeface="NanumGothic"/>
                 <a:cs typeface="NanumGothic"/>
               </a:rPr>
-              <a:t>보고서·발표자료 제작(실습)</a:t>
+              <a:t>제안서·발표자료 제작(실습)</a:t>
             </a:r>
           </a:p>
         </p:txBody>
@@ -6036,7 +6036,7 @@
                 <a:ea typeface="NanumGothic"/>
                 <a:cs typeface="NanumGothic"/>
               </a:rPr>
-              <a:t>보고서·발표 슬라이드</a:t>
+              <a:t>가설 제안서·발표 슬라이드</a:t>
             </a:r>
           </a:p>
         </p:txBody>
@@ -6512,7 +6512,7 @@
                 <a:ea typeface="NanumSquare"/>
                 <a:cs typeface="NanumSquare"/>
               </a:rPr>
-              <a:t>좋은 보고서·발표의 핵심</a:t>
+              <a:t>좋은 (가설)제안·발표의 핵심</a:t>
             </a:r>
           </a:p>
         </p:txBody>
@@ -6741,7 +6741,7 @@
                 <a:ea typeface="NanumGothic"/>
                 <a:cs typeface="NanumGothic"/>
               </a:rPr>
-              <a:t>하나의 핵심 메시지</a:t>
+              <a:t>하나의 핵심 가설(메시지)</a:t>
             </a:r>
           </a:p>
         </p:txBody>
@@ -6788,7 +6788,7 @@
                 <a:ea typeface="NanumGothic"/>
                 <a:cs typeface="NanumGothic"/>
               </a:rPr>
-              <a:t>무엇을 남길 것인가</a:t>
+              <a:t>무엇을 제안하는가</a:t>
             </a:r>
           </a:p>
         </p:txBody>
@@ -6879,7 +6879,7 @@
                 <a:ea typeface="NanumGothic"/>
                 <a:cs typeface="NanumGothic"/>
               </a:rPr>
-              <a:t>구조: 문제→접근→결과→의미</a:t>
+              <a:t>구조: 문제(gap)→가설→근거(rationale)→의미</a:t>
             </a:r>
           </a:p>
         </p:txBody>
@@ -7633,7 +7633,7 @@
                 <a:ea typeface="NanumGothic"/>
                 <a:cs typeface="NanumGothic"/>
               </a:rPr>
-              <a:t>결과·출처 입력</a:t>
+              <a:t>가설·rationale 입력</a:t>
             </a:r>
           </a:p>
         </p:txBody>
@@ -7911,7 +7911,7 @@
                 <a:ea typeface="NanumGothic"/>
                 <a:cs typeface="NanumGothic"/>
               </a:rPr>
-              <a:t>보고서/슬라이드</a:t>
+              <a:t>제안서/슬라이드</a:t>
             </a:r>
           </a:p>
         </p:txBody>
@@ -10379,7 +10379,7 @@
                 <a:ea typeface="NanumSquare"/>
                 <a:cs typeface="NanumSquare"/>
               </a:rPr>
-              <a:t>AI Agent로 보고서·발표자료 제작</a:t>
+              <a:t>AI Agent로 가설 제안서·발표자료 제작</a:t>
             </a:r>
           </a:p>
         </p:txBody>
@@ -10748,7 +10748,7 @@
                 <a:ea typeface="NanumGothic"/>
                 <a:cs typeface="NanumGothic"/>
               </a:rPr>
-              <a:t>결과·근거 정리해 입력</a:t>
+              <a:t>가설·rationale·근거 정리해 입력</a:t>
             </a:r>
           </a:p>
         </p:txBody>
@@ -10886,7 +10886,7 @@
                 <a:ea typeface="NanumGothic"/>
                 <a:cs typeface="NanumGothic"/>
               </a:rPr>
-              <a:t>보고서 초안 생성</a:t>
+              <a:t>제안서 초안 생성</a:t>
             </a:r>
           </a:p>
         </p:txBody>
@@ -11300,8 +11300,8 @@
                 <a:ea typeface="NanumGothic"/>
                 <a:cs typeface="NanumGothic"/>
               </a:rPr>
-              <a:t>발표 슬라이드 + 보고서 초안
-보고서 양식: examples/research-agent/output/report-template.md</a:t>
+              <a:t>발표 슬라이드 + 가설 제안서 초안
+제안서 양식: examples/research-agent/output/report-template.md</a:t>
             </a:r>
           </a:p>
         </p:txBody>
@@ -15885,7 +15885,7 @@
                 <a:ea typeface="NanumGothic"/>
                 <a:cs typeface="NanumGothic"/>
               </a:rPr>
-              <a:t>AI 에이전트로 보고서·발표자료를 빠르게 만들되, 검증은 사람이 한다</a:t>
+              <a:t>AI 에이전트로 가설 제안서·발표자료를 빠르게 만들되, 검증은 사람이 한다</a:t>
             </a:r>
           </a:p>
         </p:txBody>
@@ -15976,7 +15976,7 @@
                 <a:ea typeface="NanumGothic"/>
                 <a:cs typeface="NanumGothic"/>
               </a:rPr>
-              <a:t>전체 과정: LLM 원리에서 출발해 구현·실행·발표까지 완성</a:t>
+              <a:t>전체 과정: LLM 원리에서 출발해 가설 생성 에이전트로 새 가설을 제안하기까지</a:t>
             </a:r>
           </a:p>
         </p:txBody>
@@ -16740,7 +16740,7 @@
                 <a:ea typeface="NanumGothic"/>
                 <a:cs typeface="NanumGothic"/>
               </a:rPr>
-              <a:t>미완 보완 · 발표 핵심 메시지 확정 (에이전트는 Day 4 완주)</a:t>
+              <a:t>미완 보완 · 핵심 가설 확정 (에이전트는 Day 4 완주)</a:t>
             </a:r>
           </a:p>
         </p:txBody>
@@ -17062,7 +17062,7 @@
                 <a:ea typeface="NanumSquare"/>
                 <a:cs typeface="NanumSquare"/>
               </a:rPr>
-              <a:t>보고서 및 발표자료 — AI Agent 이론 및 수행</a:t>
+              <a:t>가설 제안서 및 발표자료 — AI Agent 이론 및 수행</a:t>
             </a:r>
           </a:p>
         </p:txBody>
@@ -17120,7 +17120,7 @@
                 <a:ea typeface="NanumGothic"/>
                 <a:cs typeface="NanumGothic"/>
               </a:rPr>
-              <a:t>AI 에이전트로 보고서·발표자료 만들기</a:t>
+              <a:t>AI 에이전트로 가설 제안서·발표자료 만들기</a:t>
             </a:r>
           </a:p>
         </p:txBody>
@@ -17852,7 +17852,7 @@
                 <a:ea typeface="NanumGothic"/>
                 <a:cs typeface="NanumGothic"/>
               </a:rPr>
-              <a:t>에이전트는 Day 4에 완주 — 미완 부분을 보완하고 발표를 준비한다.</a:t>
+              <a:t>에이전트는 Day 4에 완주 — 미완 부분을 보완하고 가설 제안·발표를 준비한다.</a:t>
             </a:r>
           </a:p>
         </p:txBody>
@@ -19493,7 +19493,7 @@
                 <a:ea typeface="NanumGothic"/>
                 <a:cs typeface="NanumGothic"/>
               </a:rPr>
-              <a:t>여유 팀은 개선·심화</a:t>
+              <a:t>여유 팀은 가설 추가·rationale 보강</a:t>
             </a:r>
           </a:p>
         </p:txBody>
@@ -19540,7 +19540,7 @@
                 <a:ea typeface="NanumGothic"/>
                 <a:cs typeface="NanumGothic"/>
               </a:rPr>
-              <a:t>추가 실험·분석 (선택)</a:t>
+              <a:t>(선택)</a:t>
             </a:r>
           </a:p>
         </p:txBody>
@@ -19631,7 +19631,7 @@
                 <a:ea typeface="NanumGothic"/>
                 <a:cs typeface="NanumGothic"/>
               </a:rPr>
-              <a:t>핵심 메시지 1개 정하기</a:t>
+              <a:t>핵심 가설(제안) 1개 정하기</a:t>
             </a:r>
           </a:p>
         </p:txBody>
@@ -20351,7 +20351,7 @@
                 <a:ea typeface="NanumGothic"/>
                 <a:cs typeface="NanumGothic"/>
               </a:rPr>
-              <a:t>미완 보완·재실행 → 결과 확정</a:t>
+              <a:t>미완 보완·재실행 → 가설 제안 확정</a:t>
             </a:r>
           </a:p>
         </p:txBody>
@@ -20627,7 +20627,7 @@
                 <a:ea typeface="NanumGothic"/>
                 <a:cs typeface="NanumGothic"/>
               </a:rPr>
-              <a:t>발표용 핵심 결과 선별</a:t>
+              <a:t>발표용 핵심 가설 선별</a:t>
             </a:r>
           </a:p>
         </p:txBody>
@@ -20765,7 +20765,7 @@
                 <a:ea typeface="NanumGothic"/>
                 <a:cs typeface="NanumGothic"/>
               </a:rPr>
-              <a:t>발표/보고서 준비 시작</a:t>
+              <a:t>발표/제안서 준비 시작</a:t>
             </a:r>
           </a:p>
         </p:txBody>
@@ -20903,7 +20903,7 @@
                 <a:ea typeface="NanumGothic"/>
                 <a:cs typeface="NanumGothic"/>
               </a:rPr>
-              <a:t>발표 가능한 최종 결과물 + 분석 노트</a:t>
+              <a:t>발표 가능한 최종 가설 제안 + 분석 노트</a:t>
             </a:r>
           </a:p>
         </p:txBody>
@@ -21103,7 +21103,7 @@
                 <a:ea typeface="NanumSquare"/>
                 <a:cs typeface="NanumSquare"/>
               </a:rPr>
-              <a:t>발표할 핵심 고르기</a:t>
+              <a:t>발표할 가설 고르기</a:t>
             </a:r>
           </a:p>
         </p:txBody>
@@ -21332,7 +21332,7 @@
                 <a:ea typeface="NanumGothic"/>
                 <a:cs typeface="NanumGothic"/>
               </a:rPr>
-              <a:t>가장 강한 발견 1~2개</a:t>
+              <a:t>가장 강한 가설(제안) 1~2개</a:t>
             </a:r>
           </a:p>
         </p:txBody>
@@ -21470,7 +21470,7 @@
                 <a:ea typeface="NanumGothic"/>
                 <a:cs typeface="NanumGothic"/>
               </a:rPr>
-              <a:t>근거·출처 함께</a:t>
+              <a:t>rationale·근거 함께</a:t>
             </a:r>
           </a:p>
         </p:txBody>
@@ -21655,7 +21655,7 @@
                 <a:ea typeface="NanumGothic"/>
                 <a:cs typeface="NanumGothic"/>
               </a:rPr>
-              <a:t>정직한 보고</a:t>
+              <a:t>정직한 제안</a:t>
             </a:r>
           </a:p>
         </p:txBody>
@@ -21866,7 +21866,7 @@
                 <a:ea typeface="NanumSquare"/>
                 <a:cs typeface="NanumSquare"/>
               </a:rPr>
-              <a:t>보고서 및 발표자료 — AI Agent 이론 및 수행</a:t>
+              <a:t>가설 제안서 및 발표자료 — AI Agent 이론 및 수행</a:t>
             </a:r>
           </a:p>
         </p:txBody>
@@ -21913,7 +21913,7 @@
                 <a:ea typeface="NanumGothic"/>
                 <a:cs typeface="NanumGothic"/>
               </a:rPr>
-              <a:t>AI 에이전트를 활용해 보고서와 발표자료를 빠르게 만들고 다듬는다.</a:t>
+              <a:t>AI 에이전트를 활용해 가설 제안서와 발표자료를 빠르게 만들고 다듬는다.</a:t>
             </a:r>
           </a:p>
         </p:txBody>

--- a/slides/day5.pptx
+++ b/slides/day5.pptx
@@ -3983,6 +3983,64 @@
           </a:p>
         </p:txBody>
       </p:sp>
+      <p:sp>
+        <p:nvSpPr>
+          <p:cNvPr id="21" name="TextBox 20"/>
+          <p:cNvSpPr txBox="1"/>
+          <p:nvPr/>
+        </p:nvSpPr>
+        <p:spPr>
+          <a:xfrm>
+            <a:off x="8988552" y="6419088"/>
+            <a:ext cx="2697480" cy="365760"/>
+          </a:xfrm>
+          <a:prstGeom prst="rect">
+            <a:avLst/>
+          </a:prstGeom>
+          <a:noFill/>
+        </p:spPr>
+        <p:txBody>
+          <a:bodyPr wrap="square" anchor="ctr" lIns="0" rIns="0" tIns="0" bIns="0">
+            <a:spAutoFit/>
+          </a:bodyPr>
+          <a:lstStyle/>
+          <a:p>
+            <a:pPr algn="r">
+              <a:lnSpc>
+                <a:spcPct val="100000"/>
+              </a:lnSpc>
+              <a:spcBef>
+                <a:spcPts val="0"/>
+              </a:spcBef>
+              <a:spcAft>
+                <a:spcPts val="600"/>
+              </a:spcAft>
+            </a:pPr>
+            <a:r>
+              <a:rPr sz="900" b="1">
+                <a:solidFill>
+                  <a:srgbClr val="F43F5E"/>
+                </a:solidFill>
+                <a:latin typeface="NanumGothic"/>
+                <a:ea typeface="NanumGothic"/>
+                <a:cs typeface="NanumGothic"/>
+              </a:rPr>
+              <a:t>Day 5 · 금</a:t>
+            </a:r>
+            <a:r>
+              <a:rPr sz="900" b="1">
+                <a:solidFill>
+                  <a:srgbClr val="CBD5E1"/>
+                </a:solidFill>
+                <a:latin typeface="NanumGothic"/>
+                <a:ea typeface="NanumGothic"/>
+                <a:cs typeface="NanumGothic"/>
+              </a:rPr>
+              <a:t>   ·   1 / 21</a:t>
+            </a:r>
+          </a:p>
+        </p:txBody>
+      </p:sp>
     </p:spTree>
   </p:cSld>
   <p:clrMapOvr>
@@ -4276,54 +4334,7 @@
       </p:sp>
       <p:sp>
         <p:nvSpPr>
-          <p:cNvPr id="8" name="TextBox 7"/>
-          <p:cNvSpPr txBox="1"/>
-          <p:nvPr/>
-        </p:nvSpPr>
-        <p:spPr>
-          <a:xfrm>
-            <a:off x="10241280" y="6419088"/>
-            <a:ext cx="1463040" cy="365760"/>
-          </a:xfrm>
-          <a:prstGeom prst="rect">
-            <a:avLst/>
-          </a:prstGeom>
-          <a:noFill/>
-        </p:spPr>
-        <p:txBody>
-          <a:bodyPr wrap="square" anchor="ctr" lIns="0" rIns="0" tIns="0" bIns="0">
-            <a:spAutoFit/>
-          </a:bodyPr>
-          <a:lstStyle/>
-          <a:p>
-            <a:pPr algn="r">
-              <a:lnSpc>
-                <a:spcPct val="100000"/>
-              </a:lnSpc>
-              <a:spcBef>
-                <a:spcPts val="0"/>
-              </a:spcBef>
-              <a:spcAft>
-                <a:spcPts val="600"/>
-              </a:spcAft>
-            </a:pPr>
-            <a:r>
-              <a:rPr sz="900" b="1">
-                <a:solidFill>
-                  <a:srgbClr val="F43F5E"/>
-                </a:solidFill>
-                <a:latin typeface="NanumGothic"/>
-                <a:ea typeface="NanumGothic"/>
-                <a:cs typeface="NanumGothic"/>
-              </a:rPr>
-              <a:t>Day 5 · 금</a:t>
-            </a:r>
-          </a:p>
-        </p:txBody>
-      </p:sp>
-      <p:sp>
-        <p:nvSpPr>
-          <p:cNvPr id="9" name="Rounded Rectangle 8"/>
+          <p:cNvPr id="8" name="Rounded Rectangle 7"/>
           <p:cNvSpPr/>
           <p:nvPr/>
         </p:nvSpPr>
@@ -4369,7 +4380,7 @@
       </p:sp>
       <p:sp>
         <p:nvSpPr>
-          <p:cNvPr id="10" name="TextBox 9"/>
+          <p:cNvPr id="9" name="TextBox 8"/>
           <p:cNvSpPr txBox="1"/>
           <p:nvPr/>
         </p:nvSpPr>
@@ -4416,7 +4427,7 @@
       </p:sp>
       <p:sp>
         <p:nvSpPr>
-          <p:cNvPr id="11" name="TextBox 10"/>
+          <p:cNvPr id="10" name="TextBox 9"/>
           <p:cNvSpPr txBox="1"/>
           <p:nvPr/>
         </p:nvSpPr>
@@ -4463,7 +4474,7 @@
       </p:sp>
       <p:sp>
         <p:nvSpPr>
-          <p:cNvPr id="12" name="Rounded Rectangle 11"/>
+          <p:cNvPr id="11" name="Rounded Rectangle 10"/>
           <p:cNvSpPr/>
           <p:nvPr/>
         </p:nvSpPr>
@@ -4509,7 +4520,7 @@
       </p:sp>
       <p:sp>
         <p:nvSpPr>
-          <p:cNvPr id="13" name="Oval 12"/>
+          <p:cNvPr id="12" name="Oval 11"/>
           <p:cNvSpPr/>
           <p:nvPr/>
         </p:nvSpPr>
@@ -4553,7 +4564,7 @@
       </p:sp>
       <p:sp>
         <p:nvSpPr>
-          <p:cNvPr id="14" name="TextBox 13"/>
+          <p:cNvPr id="13" name="TextBox 12"/>
           <p:cNvSpPr txBox="1"/>
           <p:nvPr/>
         </p:nvSpPr>
@@ -4600,7 +4611,7 @@
       </p:sp>
       <p:sp>
         <p:nvSpPr>
-          <p:cNvPr id="15" name="TextBox 14"/>
+          <p:cNvPr id="14" name="TextBox 13"/>
           <p:cNvSpPr txBox="1"/>
           <p:nvPr/>
         </p:nvSpPr>
@@ -4647,7 +4658,7 @@
       </p:sp>
       <p:sp>
         <p:nvSpPr>
-          <p:cNvPr id="16" name="Rounded Rectangle 15"/>
+          <p:cNvPr id="15" name="Rounded Rectangle 14"/>
           <p:cNvSpPr/>
           <p:nvPr/>
         </p:nvSpPr>
@@ -4693,7 +4704,7 @@
       </p:sp>
       <p:sp>
         <p:nvSpPr>
-          <p:cNvPr id="17" name="Oval 16"/>
+          <p:cNvPr id="16" name="Oval 15"/>
           <p:cNvSpPr/>
           <p:nvPr/>
         </p:nvSpPr>
@@ -4737,7 +4748,7 @@
       </p:sp>
       <p:sp>
         <p:nvSpPr>
-          <p:cNvPr id="18" name="TextBox 17"/>
+          <p:cNvPr id="17" name="TextBox 16"/>
           <p:cNvSpPr txBox="1"/>
           <p:nvPr/>
         </p:nvSpPr>
@@ -4784,7 +4795,7 @@
       </p:sp>
       <p:sp>
         <p:nvSpPr>
-          <p:cNvPr id="19" name="TextBox 18"/>
+          <p:cNvPr id="18" name="TextBox 17"/>
           <p:cNvSpPr txBox="1"/>
           <p:nvPr/>
         </p:nvSpPr>
@@ -4831,7 +4842,7 @@
       </p:sp>
       <p:sp>
         <p:nvSpPr>
-          <p:cNvPr id="20" name="Rounded Rectangle 19"/>
+          <p:cNvPr id="19" name="Rounded Rectangle 18"/>
           <p:cNvSpPr/>
           <p:nvPr/>
         </p:nvSpPr>
@@ -4877,7 +4888,7 @@
       </p:sp>
       <p:sp>
         <p:nvSpPr>
-          <p:cNvPr id="21" name="Oval 20"/>
+          <p:cNvPr id="20" name="Oval 19"/>
           <p:cNvSpPr/>
           <p:nvPr/>
         </p:nvSpPr>
@@ -4921,7 +4932,7 @@
       </p:sp>
       <p:sp>
         <p:nvSpPr>
-          <p:cNvPr id="22" name="TextBox 21"/>
+          <p:cNvPr id="21" name="TextBox 20"/>
           <p:cNvSpPr txBox="1"/>
           <p:nvPr/>
         </p:nvSpPr>
@@ -4968,7 +4979,7 @@
       </p:sp>
       <p:sp>
         <p:nvSpPr>
-          <p:cNvPr id="23" name="TextBox 22"/>
+          <p:cNvPr id="22" name="TextBox 21"/>
           <p:cNvSpPr txBox="1"/>
           <p:nvPr/>
         </p:nvSpPr>
@@ -5015,7 +5026,7 @@
       </p:sp>
       <p:sp>
         <p:nvSpPr>
-          <p:cNvPr id="24" name="Rounded Rectangle 23"/>
+          <p:cNvPr id="23" name="Rounded Rectangle 22"/>
           <p:cNvSpPr/>
           <p:nvPr/>
         </p:nvSpPr>
@@ -5061,7 +5072,7 @@
       </p:sp>
       <p:sp>
         <p:nvSpPr>
-          <p:cNvPr id="25" name="Oval 24"/>
+          <p:cNvPr id="24" name="Oval 23"/>
           <p:cNvSpPr/>
           <p:nvPr/>
         </p:nvSpPr>
@@ -5105,7 +5116,7 @@
       </p:sp>
       <p:sp>
         <p:nvSpPr>
-          <p:cNvPr id="26" name="TextBox 25"/>
+          <p:cNvPr id="25" name="TextBox 24"/>
           <p:cNvSpPr txBox="1"/>
           <p:nvPr/>
         </p:nvSpPr>
@@ -5152,7 +5163,7 @@
       </p:sp>
       <p:sp>
         <p:nvSpPr>
-          <p:cNvPr id="27" name="TextBox 26"/>
+          <p:cNvPr id="26" name="TextBox 25"/>
           <p:cNvSpPr txBox="1"/>
           <p:nvPr/>
         </p:nvSpPr>
@@ -5199,7 +5210,7 @@
       </p:sp>
       <p:sp>
         <p:nvSpPr>
-          <p:cNvPr id="28" name="Rounded Rectangle 27"/>
+          <p:cNvPr id="27" name="Rounded Rectangle 26"/>
           <p:cNvSpPr/>
           <p:nvPr/>
         </p:nvSpPr>
@@ -5245,7 +5256,7 @@
       </p:sp>
       <p:sp>
         <p:nvSpPr>
-          <p:cNvPr id="29" name="Oval 28"/>
+          <p:cNvPr id="28" name="Oval 27"/>
           <p:cNvSpPr/>
           <p:nvPr/>
         </p:nvSpPr>
@@ -5289,7 +5300,7 @@
       </p:sp>
       <p:sp>
         <p:nvSpPr>
-          <p:cNvPr id="30" name="TextBox 29"/>
+          <p:cNvPr id="29" name="TextBox 28"/>
           <p:cNvSpPr txBox="1"/>
           <p:nvPr/>
         </p:nvSpPr>
@@ -5336,7 +5347,7 @@
       </p:sp>
       <p:sp>
         <p:nvSpPr>
-          <p:cNvPr id="31" name="TextBox 30"/>
+          <p:cNvPr id="30" name="TextBox 29"/>
           <p:cNvSpPr txBox="1"/>
           <p:nvPr/>
         </p:nvSpPr>
@@ -5383,7 +5394,7 @@
       </p:sp>
       <p:sp>
         <p:nvSpPr>
-          <p:cNvPr id="32" name="Rounded Rectangle 31"/>
+          <p:cNvPr id="31" name="Rounded Rectangle 30"/>
           <p:cNvSpPr/>
           <p:nvPr/>
         </p:nvSpPr>
@@ -5429,7 +5440,7 @@
       </p:sp>
       <p:sp>
         <p:nvSpPr>
-          <p:cNvPr id="33" name="Oval 32"/>
+          <p:cNvPr id="32" name="Oval 31"/>
           <p:cNvSpPr/>
           <p:nvPr/>
         </p:nvSpPr>
@@ -5473,7 +5484,7 @@
       </p:sp>
       <p:sp>
         <p:nvSpPr>
-          <p:cNvPr id="34" name="TextBox 33"/>
+          <p:cNvPr id="33" name="TextBox 32"/>
           <p:cNvSpPr txBox="1"/>
           <p:nvPr/>
         </p:nvSpPr>
@@ -5520,7 +5531,7 @@
       </p:sp>
       <p:sp>
         <p:nvSpPr>
-          <p:cNvPr id="35" name="TextBox 34"/>
+          <p:cNvPr id="34" name="TextBox 33"/>
           <p:cNvSpPr txBox="1"/>
           <p:nvPr/>
         </p:nvSpPr>
@@ -5561,6 +5572,64 @@
                 <a:cs typeface="NanumGothic"/>
               </a:rPr>
               <a:t>제안서·발표자료 제작(실습)</a:t>
+            </a:r>
+          </a:p>
+        </p:txBody>
+      </p:sp>
+      <p:sp>
+        <p:nvSpPr>
+          <p:cNvPr id="35" name="TextBox 34"/>
+          <p:cNvSpPr txBox="1"/>
+          <p:nvPr/>
+        </p:nvSpPr>
+        <p:spPr>
+          <a:xfrm>
+            <a:off x="8988552" y="6419088"/>
+            <a:ext cx="2697480" cy="365760"/>
+          </a:xfrm>
+          <a:prstGeom prst="rect">
+            <a:avLst/>
+          </a:prstGeom>
+          <a:noFill/>
+        </p:spPr>
+        <p:txBody>
+          <a:bodyPr wrap="square" anchor="ctr" lIns="0" rIns="0" tIns="0" bIns="0">
+            <a:spAutoFit/>
+          </a:bodyPr>
+          <a:lstStyle/>
+          <a:p>
+            <a:pPr algn="r">
+              <a:lnSpc>
+                <a:spcPct val="100000"/>
+              </a:lnSpc>
+              <a:spcBef>
+                <a:spcPts val="0"/>
+              </a:spcBef>
+              <a:spcAft>
+                <a:spcPts val="600"/>
+              </a:spcAft>
+            </a:pPr>
+            <a:r>
+              <a:rPr sz="900" b="1">
+                <a:solidFill>
+                  <a:srgbClr val="F43F5E"/>
+                </a:solidFill>
+                <a:latin typeface="NanumGothic"/>
+                <a:ea typeface="NanumGothic"/>
+                <a:cs typeface="NanumGothic"/>
+              </a:rPr>
+              <a:t>Day 5 · 금</a:t>
+            </a:r>
+            <a:r>
+              <a:rPr sz="900" b="1">
+                <a:solidFill>
+                  <a:srgbClr val="64748B"/>
+                </a:solidFill>
+                <a:latin typeface="NanumGothic"/>
+                <a:ea typeface="NanumGothic"/>
+                <a:cs typeface="NanumGothic"/>
+              </a:rPr>
+              <a:t>   ·   10 / 21</a:t>
             </a:r>
           </a:p>
         </p:txBody>
@@ -5858,54 +5927,7 @@
       </p:sp>
       <p:sp>
         <p:nvSpPr>
-          <p:cNvPr id="8" name="TextBox 7"/>
-          <p:cNvSpPr txBox="1"/>
-          <p:nvPr/>
-        </p:nvSpPr>
-        <p:spPr>
-          <a:xfrm>
-            <a:off x="10241280" y="6419088"/>
-            <a:ext cx="1463040" cy="365760"/>
-          </a:xfrm>
-          <a:prstGeom prst="rect">
-            <a:avLst/>
-          </a:prstGeom>
-          <a:noFill/>
-        </p:spPr>
-        <p:txBody>
-          <a:bodyPr wrap="square" anchor="ctr" lIns="0" rIns="0" tIns="0" bIns="0">
-            <a:spAutoFit/>
-          </a:bodyPr>
-          <a:lstStyle/>
-          <a:p>
-            <a:pPr algn="r">
-              <a:lnSpc>
-                <a:spcPct val="100000"/>
-              </a:lnSpc>
-              <a:spcBef>
-                <a:spcPts val="0"/>
-              </a:spcBef>
-              <a:spcAft>
-                <a:spcPts val="600"/>
-              </a:spcAft>
-            </a:pPr>
-            <a:r>
-              <a:rPr sz="900" b="1">
-                <a:solidFill>
-                  <a:srgbClr val="F43F5E"/>
-                </a:solidFill>
-                <a:latin typeface="NanumGothic"/>
-                <a:ea typeface="NanumGothic"/>
-                <a:cs typeface="NanumGothic"/>
-              </a:rPr>
-              <a:t>Day 5 · 금</a:t>
-            </a:r>
-          </a:p>
-        </p:txBody>
-      </p:sp>
-      <p:sp>
-        <p:nvSpPr>
-          <p:cNvPr id="9" name="Oval 8"/>
+          <p:cNvPr id="8" name="Oval 7"/>
           <p:cNvSpPr/>
           <p:nvPr/>
         </p:nvSpPr>
@@ -5949,7 +5971,7 @@
       </p:sp>
       <p:sp>
         <p:nvSpPr>
-          <p:cNvPr id="10" name="TextBox 9"/>
+          <p:cNvPr id="9" name="TextBox 8"/>
           <p:cNvSpPr txBox="1"/>
           <p:nvPr/>
         </p:nvSpPr>
@@ -5996,7 +6018,7 @@
       </p:sp>
       <p:sp>
         <p:nvSpPr>
-          <p:cNvPr id="11" name="TextBox 10"/>
+          <p:cNvPr id="10" name="TextBox 9"/>
           <p:cNvSpPr txBox="1"/>
           <p:nvPr/>
         </p:nvSpPr>
@@ -6043,7 +6065,7 @@
       </p:sp>
       <p:sp>
         <p:nvSpPr>
-          <p:cNvPr id="12" name="Oval 11"/>
+          <p:cNvPr id="11" name="Oval 10"/>
           <p:cNvSpPr/>
           <p:nvPr/>
         </p:nvSpPr>
@@ -6087,7 +6109,7 @@
       </p:sp>
       <p:sp>
         <p:nvSpPr>
-          <p:cNvPr id="13" name="TextBox 12"/>
+          <p:cNvPr id="12" name="TextBox 11"/>
           <p:cNvSpPr txBox="1"/>
           <p:nvPr/>
         </p:nvSpPr>
@@ -6134,7 +6156,7 @@
       </p:sp>
       <p:sp>
         <p:nvSpPr>
-          <p:cNvPr id="14" name="TextBox 13"/>
+          <p:cNvPr id="13" name="TextBox 12"/>
           <p:cNvSpPr txBox="1"/>
           <p:nvPr/>
         </p:nvSpPr>
@@ -6181,7 +6203,7 @@
       </p:sp>
       <p:sp>
         <p:nvSpPr>
-          <p:cNvPr id="15" name="Oval 14"/>
+          <p:cNvPr id="14" name="Oval 13"/>
           <p:cNvSpPr/>
           <p:nvPr/>
         </p:nvSpPr>
@@ -6225,7 +6247,7 @@
       </p:sp>
       <p:sp>
         <p:nvSpPr>
-          <p:cNvPr id="16" name="TextBox 15"/>
+          <p:cNvPr id="15" name="TextBox 14"/>
           <p:cNvSpPr txBox="1"/>
           <p:nvPr/>
         </p:nvSpPr>
@@ -6272,7 +6294,7 @@
       </p:sp>
       <p:sp>
         <p:nvSpPr>
-          <p:cNvPr id="17" name="TextBox 16"/>
+          <p:cNvPr id="16" name="TextBox 15"/>
           <p:cNvSpPr txBox="1"/>
           <p:nvPr/>
         </p:nvSpPr>
@@ -6313,6 +6335,64 @@
                 <a:cs typeface="NanumGothic"/>
               </a:rPr>
               <a:t>초안은 AI, 판단·검증은 사람</a:t>
+            </a:r>
+          </a:p>
+        </p:txBody>
+      </p:sp>
+      <p:sp>
+        <p:nvSpPr>
+          <p:cNvPr id="17" name="TextBox 16"/>
+          <p:cNvSpPr txBox="1"/>
+          <p:nvPr/>
+        </p:nvSpPr>
+        <p:spPr>
+          <a:xfrm>
+            <a:off x="8988552" y="6419088"/>
+            <a:ext cx="2697480" cy="365760"/>
+          </a:xfrm>
+          <a:prstGeom prst="rect">
+            <a:avLst/>
+          </a:prstGeom>
+          <a:noFill/>
+        </p:spPr>
+        <p:txBody>
+          <a:bodyPr wrap="square" anchor="ctr" lIns="0" rIns="0" tIns="0" bIns="0">
+            <a:spAutoFit/>
+          </a:bodyPr>
+          <a:lstStyle/>
+          <a:p>
+            <a:pPr algn="r">
+              <a:lnSpc>
+                <a:spcPct val="100000"/>
+              </a:lnSpc>
+              <a:spcBef>
+                <a:spcPts val="0"/>
+              </a:spcBef>
+              <a:spcAft>
+                <a:spcPts val="600"/>
+              </a:spcAft>
+            </a:pPr>
+            <a:r>
+              <a:rPr sz="900" b="1">
+                <a:solidFill>
+                  <a:srgbClr val="F43F5E"/>
+                </a:solidFill>
+                <a:latin typeface="NanumGothic"/>
+                <a:ea typeface="NanumGothic"/>
+                <a:cs typeface="NanumGothic"/>
+              </a:rPr>
+              <a:t>Day 5 · 금</a:t>
+            </a:r>
+            <a:r>
+              <a:rPr sz="900" b="1">
+                <a:solidFill>
+                  <a:srgbClr val="64748B"/>
+                </a:solidFill>
+                <a:latin typeface="NanumGothic"/>
+                <a:ea typeface="NanumGothic"/>
+                <a:cs typeface="NanumGothic"/>
+              </a:rPr>
+              <a:t>   ·   11 / 21</a:t>
             </a:r>
           </a:p>
         </p:txBody>
@@ -6610,54 +6690,7 @@
       </p:sp>
       <p:sp>
         <p:nvSpPr>
-          <p:cNvPr id="8" name="TextBox 7"/>
-          <p:cNvSpPr txBox="1"/>
-          <p:nvPr/>
-        </p:nvSpPr>
-        <p:spPr>
-          <a:xfrm>
-            <a:off x="10241280" y="6419088"/>
-            <a:ext cx="1463040" cy="365760"/>
-          </a:xfrm>
-          <a:prstGeom prst="rect">
-            <a:avLst/>
-          </a:prstGeom>
-          <a:noFill/>
-        </p:spPr>
-        <p:txBody>
-          <a:bodyPr wrap="square" anchor="ctr" lIns="0" rIns="0" tIns="0" bIns="0">
-            <a:spAutoFit/>
-          </a:bodyPr>
-          <a:lstStyle/>
-          <a:p>
-            <a:pPr algn="r">
-              <a:lnSpc>
-                <a:spcPct val="100000"/>
-              </a:lnSpc>
-              <a:spcBef>
-                <a:spcPts val="0"/>
-              </a:spcBef>
-              <a:spcAft>
-                <a:spcPts val="600"/>
-              </a:spcAft>
-            </a:pPr>
-            <a:r>
-              <a:rPr sz="900" b="1">
-                <a:solidFill>
-                  <a:srgbClr val="F43F5E"/>
-                </a:solidFill>
-                <a:latin typeface="NanumGothic"/>
-                <a:ea typeface="NanumGothic"/>
-                <a:cs typeface="NanumGothic"/>
-              </a:rPr>
-              <a:t>Day 5 · 금</a:t>
-            </a:r>
-          </a:p>
-        </p:txBody>
-      </p:sp>
-      <p:sp>
-        <p:nvSpPr>
-          <p:cNvPr id="9" name="Oval 8"/>
+          <p:cNvPr id="8" name="Oval 7"/>
           <p:cNvSpPr/>
           <p:nvPr/>
         </p:nvSpPr>
@@ -6701,7 +6734,7 @@
       </p:sp>
       <p:sp>
         <p:nvSpPr>
-          <p:cNvPr id="10" name="TextBox 9"/>
+          <p:cNvPr id="9" name="TextBox 8"/>
           <p:cNvSpPr txBox="1"/>
           <p:nvPr/>
         </p:nvSpPr>
@@ -6748,7 +6781,7 @@
       </p:sp>
       <p:sp>
         <p:nvSpPr>
-          <p:cNvPr id="11" name="TextBox 10"/>
+          <p:cNvPr id="10" name="TextBox 9"/>
           <p:cNvSpPr txBox="1"/>
           <p:nvPr/>
         </p:nvSpPr>
@@ -6795,7 +6828,7 @@
       </p:sp>
       <p:sp>
         <p:nvSpPr>
-          <p:cNvPr id="12" name="Oval 11"/>
+          <p:cNvPr id="11" name="Oval 10"/>
           <p:cNvSpPr/>
           <p:nvPr/>
         </p:nvSpPr>
@@ -6839,7 +6872,7 @@
       </p:sp>
       <p:sp>
         <p:nvSpPr>
-          <p:cNvPr id="13" name="TextBox 12"/>
+          <p:cNvPr id="12" name="TextBox 11"/>
           <p:cNvSpPr txBox="1"/>
           <p:nvPr/>
         </p:nvSpPr>
@@ -6886,7 +6919,7 @@
       </p:sp>
       <p:sp>
         <p:nvSpPr>
-          <p:cNvPr id="14" name="TextBox 13"/>
+          <p:cNvPr id="13" name="TextBox 12"/>
           <p:cNvSpPr txBox="1"/>
           <p:nvPr/>
         </p:nvSpPr>
@@ -6933,7 +6966,7 @@
       </p:sp>
       <p:sp>
         <p:nvSpPr>
-          <p:cNvPr id="15" name="Oval 14"/>
+          <p:cNvPr id="14" name="Oval 13"/>
           <p:cNvSpPr/>
           <p:nvPr/>
         </p:nvSpPr>
@@ -6977,7 +7010,7 @@
       </p:sp>
       <p:sp>
         <p:nvSpPr>
-          <p:cNvPr id="16" name="TextBox 15"/>
+          <p:cNvPr id="15" name="TextBox 14"/>
           <p:cNvSpPr txBox="1"/>
           <p:nvPr/>
         </p:nvSpPr>
@@ -7024,7 +7057,7 @@
       </p:sp>
       <p:sp>
         <p:nvSpPr>
-          <p:cNvPr id="17" name="TextBox 16"/>
+          <p:cNvPr id="16" name="TextBox 15"/>
           <p:cNvSpPr txBox="1"/>
           <p:nvPr/>
         </p:nvSpPr>
@@ -7065,6 +7098,64 @@
                 <a:cs typeface="NanumGothic"/>
               </a:rPr>
               <a:t>신뢰</a:t>
+            </a:r>
+          </a:p>
+        </p:txBody>
+      </p:sp>
+      <p:sp>
+        <p:nvSpPr>
+          <p:cNvPr id="17" name="TextBox 16"/>
+          <p:cNvSpPr txBox="1"/>
+          <p:nvPr/>
+        </p:nvSpPr>
+        <p:spPr>
+          <a:xfrm>
+            <a:off x="8988552" y="6419088"/>
+            <a:ext cx="2697480" cy="365760"/>
+          </a:xfrm>
+          <a:prstGeom prst="rect">
+            <a:avLst/>
+          </a:prstGeom>
+          <a:noFill/>
+        </p:spPr>
+        <p:txBody>
+          <a:bodyPr wrap="square" anchor="ctr" lIns="0" rIns="0" tIns="0" bIns="0">
+            <a:spAutoFit/>
+          </a:bodyPr>
+          <a:lstStyle/>
+          <a:p>
+            <a:pPr algn="r">
+              <a:lnSpc>
+                <a:spcPct val="100000"/>
+              </a:lnSpc>
+              <a:spcBef>
+                <a:spcPts val="0"/>
+              </a:spcBef>
+              <a:spcAft>
+                <a:spcPts val="600"/>
+              </a:spcAft>
+            </a:pPr>
+            <a:r>
+              <a:rPr sz="900" b="1">
+                <a:solidFill>
+                  <a:srgbClr val="F43F5E"/>
+                </a:solidFill>
+                <a:latin typeface="NanumGothic"/>
+                <a:ea typeface="NanumGothic"/>
+                <a:cs typeface="NanumGothic"/>
+              </a:rPr>
+              <a:t>Day 5 · 금</a:t>
+            </a:r>
+            <a:r>
+              <a:rPr sz="900" b="1">
+                <a:solidFill>
+                  <a:srgbClr val="64748B"/>
+                </a:solidFill>
+                <a:latin typeface="NanumGothic"/>
+                <a:ea typeface="NanumGothic"/>
+                <a:cs typeface="NanumGothic"/>
+              </a:rPr>
+              <a:t>   ·   12 / 21</a:t>
             </a:r>
           </a:p>
         </p:txBody>
@@ -7362,54 +7453,7 @@
       </p:sp>
       <p:sp>
         <p:nvSpPr>
-          <p:cNvPr id="8" name="TextBox 7"/>
-          <p:cNvSpPr txBox="1"/>
-          <p:nvPr/>
-        </p:nvSpPr>
-        <p:spPr>
-          <a:xfrm>
-            <a:off x="10241280" y="6419088"/>
-            <a:ext cx="1463040" cy="365760"/>
-          </a:xfrm>
-          <a:prstGeom prst="rect">
-            <a:avLst/>
-          </a:prstGeom>
-          <a:noFill/>
-        </p:spPr>
-        <p:txBody>
-          <a:bodyPr wrap="square" anchor="ctr" lIns="0" rIns="0" tIns="0" bIns="0">
-            <a:spAutoFit/>
-          </a:bodyPr>
-          <a:lstStyle/>
-          <a:p>
-            <a:pPr algn="r">
-              <a:lnSpc>
-                <a:spcPct val="100000"/>
-              </a:lnSpc>
-              <a:spcBef>
-                <a:spcPts val="0"/>
-              </a:spcBef>
-              <a:spcAft>
-                <a:spcPts val="600"/>
-              </a:spcAft>
-            </a:pPr>
-            <a:r>
-              <a:rPr sz="900" b="1">
-                <a:solidFill>
-                  <a:srgbClr val="F43F5E"/>
-                </a:solidFill>
-                <a:latin typeface="NanumGothic"/>
-                <a:ea typeface="NanumGothic"/>
-                <a:cs typeface="NanumGothic"/>
-              </a:rPr>
-              <a:t>Day 5 · 금</a:t>
-            </a:r>
-          </a:p>
-        </p:txBody>
-      </p:sp>
-      <p:sp>
-        <p:nvSpPr>
-          <p:cNvPr id="9" name="Rounded Rectangle 8"/>
+          <p:cNvPr id="8" name="Rounded Rectangle 7"/>
           <p:cNvSpPr/>
           <p:nvPr/>
         </p:nvSpPr>
@@ -7455,7 +7499,7 @@
       </p:sp>
       <p:sp>
         <p:nvSpPr>
-          <p:cNvPr id="10" name="Rectangle 9"/>
+          <p:cNvPr id="9" name="Rectangle 8"/>
           <p:cNvSpPr/>
           <p:nvPr/>
         </p:nvSpPr>
@@ -7499,7 +7543,7 @@
       </p:sp>
       <p:sp>
         <p:nvSpPr>
-          <p:cNvPr id="11" name="TextBox 10"/>
+          <p:cNvPr id="10" name="TextBox 9"/>
           <p:cNvSpPr txBox="1"/>
           <p:nvPr/>
         </p:nvSpPr>
@@ -7546,7 +7590,7 @@
       </p:sp>
       <p:sp>
         <p:nvSpPr>
-          <p:cNvPr id="12" name="TextBox 11"/>
+          <p:cNvPr id="11" name="TextBox 10"/>
           <p:cNvSpPr txBox="1"/>
           <p:nvPr/>
         </p:nvSpPr>
@@ -7593,7 +7637,7 @@
       </p:sp>
       <p:sp>
         <p:nvSpPr>
-          <p:cNvPr id="13" name="TextBox 12"/>
+          <p:cNvPr id="12" name="TextBox 11"/>
           <p:cNvSpPr txBox="1"/>
           <p:nvPr/>
         </p:nvSpPr>
@@ -7640,7 +7684,7 @@
       </p:sp>
       <p:sp>
         <p:nvSpPr>
-          <p:cNvPr id="14" name="TextBox 13"/>
+          <p:cNvPr id="13" name="TextBox 12"/>
           <p:cNvSpPr txBox="1"/>
           <p:nvPr/>
         </p:nvSpPr>
@@ -7687,7 +7731,7 @@
       </p:sp>
       <p:sp>
         <p:nvSpPr>
-          <p:cNvPr id="15" name="Rounded Rectangle 14"/>
+          <p:cNvPr id="14" name="Rounded Rectangle 13"/>
           <p:cNvSpPr/>
           <p:nvPr/>
         </p:nvSpPr>
@@ -7733,7 +7777,7 @@
       </p:sp>
       <p:sp>
         <p:nvSpPr>
-          <p:cNvPr id="16" name="Rectangle 15"/>
+          <p:cNvPr id="15" name="Rectangle 14"/>
           <p:cNvSpPr/>
           <p:nvPr/>
         </p:nvSpPr>
@@ -7777,7 +7821,7 @@
       </p:sp>
       <p:sp>
         <p:nvSpPr>
-          <p:cNvPr id="17" name="TextBox 16"/>
+          <p:cNvPr id="16" name="TextBox 15"/>
           <p:cNvSpPr txBox="1"/>
           <p:nvPr/>
         </p:nvSpPr>
@@ -7824,7 +7868,7 @@
       </p:sp>
       <p:sp>
         <p:nvSpPr>
-          <p:cNvPr id="18" name="TextBox 17"/>
+          <p:cNvPr id="17" name="TextBox 16"/>
           <p:cNvSpPr txBox="1"/>
           <p:nvPr/>
         </p:nvSpPr>
@@ -7871,7 +7915,7 @@
       </p:sp>
       <p:sp>
         <p:nvSpPr>
-          <p:cNvPr id="19" name="TextBox 18"/>
+          <p:cNvPr id="18" name="TextBox 17"/>
           <p:cNvSpPr txBox="1"/>
           <p:nvPr/>
         </p:nvSpPr>
@@ -7918,7 +7962,7 @@
       </p:sp>
       <p:sp>
         <p:nvSpPr>
-          <p:cNvPr id="20" name="TextBox 19"/>
+          <p:cNvPr id="19" name="TextBox 18"/>
           <p:cNvSpPr txBox="1"/>
           <p:nvPr/>
         </p:nvSpPr>
@@ -7965,7 +8009,7 @@
       </p:sp>
       <p:sp>
         <p:nvSpPr>
-          <p:cNvPr id="21" name="Rounded Rectangle 20"/>
+          <p:cNvPr id="20" name="Rounded Rectangle 19"/>
           <p:cNvSpPr/>
           <p:nvPr/>
         </p:nvSpPr>
@@ -8011,7 +8055,7 @@
       </p:sp>
       <p:sp>
         <p:nvSpPr>
-          <p:cNvPr id="22" name="Rectangle 21"/>
+          <p:cNvPr id="21" name="Rectangle 20"/>
           <p:cNvSpPr/>
           <p:nvPr/>
         </p:nvSpPr>
@@ -8055,7 +8099,7 @@
       </p:sp>
       <p:sp>
         <p:nvSpPr>
-          <p:cNvPr id="23" name="TextBox 22"/>
+          <p:cNvPr id="22" name="TextBox 21"/>
           <p:cNvSpPr txBox="1"/>
           <p:nvPr/>
         </p:nvSpPr>
@@ -8102,7 +8146,7 @@
       </p:sp>
       <p:sp>
         <p:nvSpPr>
-          <p:cNvPr id="24" name="TextBox 23"/>
+          <p:cNvPr id="23" name="TextBox 22"/>
           <p:cNvSpPr txBox="1"/>
           <p:nvPr/>
         </p:nvSpPr>
@@ -8149,7 +8193,7 @@
       </p:sp>
       <p:sp>
         <p:nvSpPr>
-          <p:cNvPr id="25" name="TextBox 24"/>
+          <p:cNvPr id="24" name="TextBox 23"/>
           <p:cNvSpPr txBox="1"/>
           <p:nvPr/>
         </p:nvSpPr>
@@ -8196,7 +8240,7 @@
       </p:sp>
       <p:sp>
         <p:nvSpPr>
-          <p:cNvPr id="26" name="TextBox 25"/>
+          <p:cNvPr id="25" name="TextBox 24"/>
           <p:cNvSpPr txBox="1"/>
           <p:nvPr/>
         </p:nvSpPr>
@@ -8243,7 +8287,7 @@
       </p:sp>
       <p:sp>
         <p:nvSpPr>
-          <p:cNvPr id="27" name="Rounded Rectangle 26"/>
+          <p:cNvPr id="26" name="Rounded Rectangle 25"/>
           <p:cNvSpPr/>
           <p:nvPr/>
         </p:nvSpPr>
@@ -8289,7 +8333,7 @@
       </p:sp>
       <p:sp>
         <p:nvSpPr>
-          <p:cNvPr id="28" name="Rectangle 27"/>
+          <p:cNvPr id="27" name="Rectangle 26"/>
           <p:cNvSpPr/>
           <p:nvPr/>
         </p:nvSpPr>
@@ -8333,7 +8377,7 @@
       </p:sp>
       <p:sp>
         <p:nvSpPr>
-          <p:cNvPr id="29" name="TextBox 28"/>
+          <p:cNvPr id="28" name="TextBox 27"/>
           <p:cNvSpPr txBox="1"/>
           <p:nvPr/>
         </p:nvSpPr>
@@ -8380,7 +8424,7 @@
       </p:sp>
       <p:sp>
         <p:nvSpPr>
-          <p:cNvPr id="30" name="TextBox 29"/>
+          <p:cNvPr id="29" name="TextBox 28"/>
           <p:cNvSpPr txBox="1"/>
           <p:nvPr/>
         </p:nvSpPr>
@@ -8427,7 +8471,7 @@
       </p:sp>
       <p:sp>
         <p:nvSpPr>
-          <p:cNvPr id="31" name="TextBox 30"/>
+          <p:cNvPr id="30" name="TextBox 29"/>
           <p:cNvSpPr txBox="1"/>
           <p:nvPr/>
         </p:nvSpPr>
@@ -8474,7 +8518,7 @@
       </p:sp>
       <p:sp>
         <p:nvSpPr>
-          <p:cNvPr id="32" name="Rounded Rectangle 31"/>
+          <p:cNvPr id="31" name="Rounded Rectangle 30"/>
           <p:cNvSpPr/>
           <p:nvPr/>
         </p:nvSpPr>
@@ -8520,7 +8564,7 @@
       </p:sp>
       <p:sp>
         <p:nvSpPr>
-          <p:cNvPr id="33" name="TextBox 32"/>
+          <p:cNvPr id="32" name="TextBox 31"/>
           <p:cNvSpPr txBox="1"/>
           <p:nvPr/>
         </p:nvSpPr>
@@ -8572,6 +8616,64 @@
                 <a:cs typeface="NanumGothic"/>
               </a:rPr>
               <a:t>사람이 방향을 주고, AI가 초안을 빠르게 만든다</a:t>
+            </a:r>
+          </a:p>
+        </p:txBody>
+      </p:sp>
+      <p:sp>
+        <p:nvSpPr>
+          <p:cNvPr id="33" name="TextBox 32"/>
+          <p:cNvSpPr txBox="1"/>
+          <p:nvPr/>
+        </p:nvSpPr>
+        <p:spPr>
+          <a:xfrm>
+            <a:off x="8988552" y="6419088"/>
+            <a:ext cx="2697480" cy="365760"/>
+          </a:xfrm>
+          <a:prstGeom prst="rect">
+            <a:avLst/>
+          </a:prstGeom>
+          <a:noFill/>
+        </p:spPr>
+        <p:txBody>
+          <a:bodyPr wrap="square" anchor="ctr" lIns="0" rIns="0" tIns="0" bIns="0">
+            <a:spAutoFit/>
+          </a:bodyPr>
+          <a:lstStyle/>
+          <a:p>
+            <a:pPr algn="r">
+              <a:lnSpc>
+                <a:spcPct val="100000"/>
+              </a:lnSpc>
+              <a:spcBef>
+                <a:spcPts val="0"/>
+              </a:spcBef>
+              <a:spcAft>
+                <a:spcPts val="600"/>
+              </a:spcAft>
+            </a:pPr>
+            <a:r>
+              <a:rPr sz="900" b="1">
+                <a:solidFill>
+                  <a:srgbClr val="F43F5E"/>
+                </a:solidFill>
+                <a:latin typeface="NanumGothic"/>
+                <a:ea typeface="NanumGothic"/>
+                <a:cs typeface="NanumGothic"/>
+              </a:rPr>
+              <a:t>Day 5 · 금</a:t>
+            </a:r>
+            <a:r>
+              <a:rPr sz="900" b="1">
+                <a:solidFill>
+                  <a:srgbClr val="64748B"/>
+                </a:solidFill>
+                <a:latin typeface="NanumGothic"/>
+                <a:ea typeface="NanumGothic"/>
+                <a:cs typeface="NanumGothic"/>
+              </a:rPr>
+              <a:t>   ·   13 / 21</a:t>
             </a:r>
           </a:p>
         </p:txBody>
@@ -8869,54 +8971,7 @@
       </p:sp>
       <p:sp>
         <p:nvSpPr>
-          <p:cNvPr id="8" name="TextBox 7"/>
-          <p:cNvSpPr txBox="1"/>
-          <p:nvPr/>
-        </p:nvSpPr>
-        <p:spPr>
-          <a:xfrm>
-            <a:off x="10241280" y="6419088"/>
-            <a:ext cx="1463040" cy="365760"/>
-          </a:xfrm>
-          <a:prstGeom prst="rect">
-            <a:avLst/>
-          </a:prstGeom>
-          <a:noFill/>
-        </p:spPr>
-        <p:txBody>
-          <a:bodyPr wrap="square" anchor="ctr" lIns="0" rIns="0" tIns="0" bIns="0">
-            <a:spAutoFit/>
-          </a:bodyPr>
-          <a:lstStyle/>
-          <a:p>
-            <a:pPr algn="r">
-              <a:lnSpc>
-                <a:spcPct val="100000"/>
-              </a:lnSpc>
-              <a:spcBef>
-                <a:spcPts val="0"/>
-              </a:spcBef>
-              <a:spcAft>
-                <a:spcPts val="600"/>
-              </a:spcAft>
-            </a:pPr>
-            <a:r>
-              <a:rPr sz="900" b="1">
-                <a:solidFill>
-                  <a:srgbClr val="F43F5E"/>
-                </a:solidFill>
-                <a:latin typeface="NanumGothic"/>
-                <a:ea typeface="NanumGothic"/>
-                <a:cs typeface="NanumGothic"/>
-              </a:rPr>
-              <a:t>Day 5 · 금</a:t>
-            </a:r>
-          </a:p>
-        </p:txBody>
-      </p:sp>
-      <p:sp>
-        <p:nvSpPr>
-          <p:cNvPr id="9" name="Oval 8"/>
+          <p:cNvPr id="8" name="Oval 7"/>
           <p:cNvSpPr/>
           <p:nvPr/>
         </p:nvSpPr>
@@ -8960,7 +9015,7 @@
       </p:sp>
       <p:sp>
         <p:nvSpPr>
-          <p:cNvPr id="10" name="TextBox 9"/>
+          <p:cNvPr id="9" name="TextBox 8"/>
           <p:cNvSpPr txBox="1"/>
           <p:nvPr/>
         </p:nvSpPr>
@@ -9007,7 +9062,7 @@
       </p:sp>
       <p:sp>
         <p:nvSpPr>
-          <p:cNvPr id="11" name="TextBox 10"/>
+          <p:cNvPr id="10" name="TextBox 9"/>
           <p:cNvSpPr txBox="1"/>
           <p:nvPr/>
         </p:nvSpPr>
@@ -9054,7 +9109,7 @@
       </p:sp>
       <p:sp>
         <p:nvSpPr>
-          <p:cNvPr id="12" name="Oval 11"/>
+          <p:cNvPr id="11" name="Oval 10"/>
           <p:cNvSpPr/>
           <p:nvPr/>
         </p:nvSpPr>
@@ -9098,7 +9153,7 @@
       </p:sp>
       <p:sp>
         <p:nvSpPr>
-          <p:cNvPr id="13" name="TextBox 12"/>
+          <p:cNvPr id="12" name="TextBox 11"/>
           <p:cNvSpPr txBox="1"/>
           <p:nvPr/>
         </p:nvSpPr>
@@ -9145,7 +9200,7 @@
       </p:sp>
       <p:sp>
         <p:nvSpPr>
-          <p:cNvPr id="14" name="TextBox 13"/>
+          <p:cNvPr id="13" name="TextBox 12"/>
           <p:cNvSpPr txBox="1"/>
           <p:nvPr/>
         </p:nvSpPr>
@@ -9192,7 +9247,7 @@
       </p:sp>
       <p:sp>
         <p:nvSpPr>
-          <p:cNvPr id="15" name="Oval 14"/>
+          <p:cNvPr id="14" name="Oval 13"/>
           <p:cNvSpPr/>
           <p:nvPr/>
         </p:nvSpPr>
@@ -9236,7 +9291,7 @@
       </p:sp>
       <p:sp>
         <p:nvSpPr>
-          <p:cNvPr id="16" name="TextBox 15"/>
+          <p:cNvPr id="15" name="TextBox 14"/>
           <p:cNvSpPr txBox="1"/>
           <p:nvPr/>
         </p:nvSpPr>
@@ -9283,7 +9338,7 @@
       </p:sp>
       <p:sp>
         <p:nvSpPr>
-          <p:cNvPr id="17" name="TextBox 16"/>
+          <p:cNvPr id="16" name="TextBox 15"/>
           <p:cNvSpPr txBox="1"/>
           <p:nvPr/>
         </p:nvSpPr>
@@ -9324,6 +9379,64 @@
                 <a:cs typeface="NanumGothic"/>
               </a:rPr>
               <a:t>결과·근거를 함께 전달</a:t>
+            </a:r>
+          </a:p>
+        </p:txBody>
+      </p:sp>
+      <p:sp>
+        <p:nvSpPr>
+          <p:cNvPr id="17" name="TextBox 16"/>
+          <p:cNvSpPr txBox="1"/>
+          <p:nvPr/>
+        </p:nvSpPr>
+        <p:spPr>
+          <a:xfrm>
+            <a:off x="8988552" y="6419088"/>
+            <a:ext cx="2697480" cy="365760"/>
+          </a:xfrm>
+          <a:prstGeom prst="rect">
+            <a:avLst/>
+          </a:prstGeom>
+          <a:noFill/>
+        </p:spPr>
+        <p:txBody>
+          <a:bodyPr wrap="square" anchor="ctr" lIns="0" rIns="0" tIns="0" bIns="0">
+            <a:spAutoFit/>
+          </a:bodyPr>
+          <a:lstStyle/>
+          <a:p>
+            <a:pPr algn="r">
+              <a:lnSpc>
+                <a:spcPct val="100000"/>
+              </a:lnSpc>
+              <a:spcBef>
+                <a:spcPts val="0"/>
+              </a:spcBef>
+              <a:spcAft>
+                <a:spcPts val="600"/>
+              </a:spcAft>
+            </a:pPr>
+            <a:r>
+              <a:rPr sz="900" b="1">
+                <a:solidFill>
+                  <a:srgbClr val="F43F5E"/>
+                </a:solidFill>
+                <a:latin typeface="NanumGothic"/>
+                <a:ea typeface="NanumGothic"/>
+                <a:cs typeface="NanumGothic"/>
+              </a:rPr>
+              <a:t>Day 5 · 금</a:t>
+            </a:r>
+            <a:r>
+              <a:rPr sz="900" b="1">
+                <a:solidFill>
+                  <a:srgbClr val="64748B"/>
+                </a:solidFill>
+                <a:latin typeface="NanumGothic"/>
+                <a:ea typeface="NanumGothic"/>
+                <a:cs typeface="NanumGothic"/>
+              </a:rPr>
+              <a:t>   ·   14 / 21</a:t>
             </a:r>
           </a:p>
         </p:txBody>
@@ -9621,54 +9734,7 @@
       </p:sp>
       <p:sp>
         <p:nvSpPr>
-          <p:cNvPr id="8" name="TextBox 7"/>
-          <p:cNvSpPr txBox="1"/>
-          <p:nvPr/>
-        </p:nvSpPr>
-        <p:spPr>
-          <a:xfrm>
-            <a:off x="10241280" y="6419088"/>
-            <a:ext cx="1463040" cy="365760"/>
-          </a:xfrm>
-          <a:prstGeom prst="rect">
-            <a:avLst/>
-          </a:prstGeom>
-          <a:noFill/>
-        </p:spPr>
-        <p:txBody>
-          <a:bodyPr wrap="square" anchor="ctr" lIns="0" rIns="0" tIns="0" bIns="0">
-            <a:spAutoFit/>
-          </a:bodyPr>
-          <a:lstStyle/>
-          <a:p>
-            <a:pPr algn="r">
-              <a:lnSpc>
-                <a:spcPct val="100000"/>
-              </a:lnSpc>
-              <a:spcBef>
-                <a:spcPts val="0"/>
-              </a:spcBef>
-              <a:spcAft>
-                <a:spcPts val="600"/>
-              </a:spcAft>
-            </a:pPr>
-            <a:r>
-              <a:rPr sz="900" b="1">
-                <a:solidFill>
-                  <a:srgbClr val="F43F5E"/>
-                </a:solidFill>
-                <a:latin typeface="NanumGothic"/>
-                <a:ea typeface="NanumGothic"/>
-                <a:cs typeface="NanumGothic"/>
-              </a:rPr>
-              <a:t>Day 5 · 금</a:t>
-            </a:r>
-          </a:p>
-        </p:txBody>
-      </p:sp>
-      <p:sp>
-        <p:nvSpPr>
-          <p:cNvPr id="9" name="Oval 8"/>
+          <p:cNvPr id="8" name="Oval 7"/>
           <p:cNvSpPr/>
           <p:nvPr/>
         </p:nvSpPr>
@@ -9712,7 +9778,7 @@
       </p:sp>
       <p:sp>
         <p:nvSpPr>
-          <p:cNvPr id="10" name="TextBox 9"/>
+          <p:cNvPr id="9" name="TextBox 8"/>
           <p:cNvSpPr txBox="1"/>
           <p:nvPr/>
         </p:nvSpPr>
@@ -9759,7 +9825,7 @@
       </p:sp>
       <p:sp>
         <p:nvSpPr>
-          <p:cNvPr id="11" name="TextBox 10"/>
+          <p:cNvPr id="10" name="TextBox 9"/>
           <p:cNvSpPr txBox="1"/>
           <p:nvPr/>
         </p:nvSpPr>
@@ -9806,7 +9872,7 @@
       </p:sp>
       <p:sp>
         <p:nvSpPr>
-          <p:cNvPr id="12" name="Oval 11"/>
+          <p:cNvPr id="11" name="Oval 10"/>
           <p:cNvSpPr/>
           <p:nvPr/>
         </p:nvSpPr>
@@ -9850,7 +9916,7 @@
       </p:sp>
       <p:sp>
         <p:nvSpPr>
-          <p:cNvPr id="13" name="TextBox 12"/>
+          <p:cNvPr id="12" name="TextBox 11"/>
           <p:cNvSpPr txBox="1"/>
           <p:nvPr/>
         </p:nvSpPr>
@@ -9897,7 +9963,7 @@
       </p:sp>
       <p:sp>
         <p:nvSpPr>
-          <p:cNvPr id="14" name="TextBox 13"/>
+          <p:cNvPr id="13" name="TextBox 12"/>
           <p:cNvSpPr txBox="1"/>
           <p:nvPr/>
         </p:nvSpPr>
@@ -9944,7 +10010,7 @@
       </p:sp>
       <p:sp>
         <p:nvSpPr>
-          <p:cNvPr id="15" name="Oval 14"/>
+          <p:cNvPr id="14" name="Oval 13"/>
           <p:cNvSpPr/>
           <p:nvPr/>
         </p:nvSpPr>
@@ -9988,7 +10054,7 @@
       </p:sp>
       <p:sp>
         <p:nvSpPr>
-          <p:cNvPr id="16" name="TextBox 15"/>
+          <p:cNvPr id="15" name="TextBox 14"/>
           <p:cNvSpPr txBox="1"/>
           <p:nvPr/>
         </p:nvSpPr>
@@ -10035,7 +10101,7 @@
       </p:sp>
       <p:sp>
         <p:nvSpPr>
-          <p:cNvPr id="17" name="TextBox 16"/>
+          <p:cNvPr id="16" name="TextBox 15"/>
           <p:cNvSpPr txBox="1"/>
           <p:nvPr/>
         </p:nvSpPr>
@@ -10082,7 +10148,7 @@
       </p:sp>
       <p:sp>
         <p:nvSpPr>
-          <p:cNvPr id="18" name="Rounded Rectangle 17"/>
+          <p:cNvPr id="17" name="Rounded Rectangle 16"/>
           <p:cNvSpPr/>
           <p:nvPr/>
         </p:nvSpPr>
@@ -10128,7 +10194,7 @@
       </p:sp>
       <p:sp>
         <p:nvSpPr>
-          <p:cNvPr id="19" name="TextBox 18"/>
+          <p:cNvPr id="18" name="TextBox 17"/>
           <p:cNvSpPr txBox="1"/>
           <p:nvPr/>
         </p:nvSpPr>
@@ -10180,6 +10246,64 @@
                 <a:cs typeface="NanumGothic"/>
               </a:rPr>
               <a:t>AI 초안 ≠ 최종본 — 반드시 검토</a:t>
+            </a:r>
+          </a:p>
+        </p:txBody>
+      </p:sp>
+      <p:sp>
+        <p:nvSpPr>
+          <p:cNvPr id="19" name="TextBox 18"/>
+          <p:cNvSpPr txBox="1"/>
+          <p:nvPr/>
+        </p:nvSpPr>
+        <p:spPr>
+          <a:xfrm>
+            <a:off x="8988552" y="6419088"/>
+            <a:ext cx="2697480" cy="365760"/>
+          </a:xfrm>
+          <a:prstGeom prst="rect">
+            <a:avLst/>
+          </a:prstGeom>
+          <a:noFill/>
+        </p:spPr>
+        <p:txBody>
+          <a:bodyPr wrap="square" anchor="ctr" lIns="0" rIns="0" tIns="0" bIns="0">
+            <a:spAutoFit/>
+          </a:bodyPr>
+          <a:lstStyle/>
+          <a:p>
+            <a:pPr algn="r">
+              <a:lnSpc>
+                <a:spcPct val="100000"/>
+              </a:lnSpc>
+              <a:spcBef>
+                <a:spcPts val="0"/>
+              </a:spcBef>
+              <a:spcAft>
+                <a:spcPts val="600"/>
+              </a:spcAft>
+            </a:pPr>
+            <a:r>
+              <a:rPr sz="900" b="1">
+                <a:solidFill>
+                  <a:srgbClr val="F43F5E"/>
+                </a:solidFill>
+                <a:latin typeface="NanumGothic"/>
+                <a:ea typeface="NanumGothic"/>
+                <a:cs typeface="NanumGothic"/>
+              </a:rPr>
+              <a:t>Day 5 · 금</a:t>
+            </a:r>
+            <a:r>
+              <a:rPr sz="900" b="1">
+                <a:solidFill>
+                  <a:srgbClr val="64748B"/>
+                </a:solidFill>
+                <a:latin typeface="NanumGothic"/>
+                <a:ea typeface="NanumGothic"/>
+                <a:cs typeface="NanumGothic"/>
+              </a:rPr>
+              <a:t>   ·   15 / 21</a:t>
             </a:r>
           </a:p>
         </p:txBody>
@@ -10477,54 +10601,7 @@
       </p:sp>
       <p:sp>
         <p:nvSpPr>
-          <p:cNvPr id="8" name="TextBox 7"/>
-          <p:cNvSpPr txBox="1"/>
-          <p:nvPr/>
-        </p:nvSpPr>
-        <p:spPr>
-          <a:xfrm>
-            <a:off x="10241280" y="6419088"/>
-            <a:ext cx="1463040" cy="365760"/>
-          </a:xfrm>
-          <a:prstGeom prst="rect">
-            <a:avLst/>
-          </a:prstGeom>
-          <a:noFill/>
-        </p:spPr>
-        <p:txBody>
-          <a:bodyPr wrap="square" anchor="ctr" lIns="0" rIns="0" tIns="0" bIns="0">
-            <a:spAutoFit/>
-          </a:bodyPr>
-          <a:lstStyle/>
-          <a:p>
-            <a:pPr algn="r">
-              <a:lnSpc>
-                <a:spcPct val="100000"/>
-              </a:lnSpc>
-              <a:spcBef>
-                <a:spcPts val="0"/>
-              </a:spcBef>
-              <a:spcAft>
-                <a:spcPts val="600"/>
-              </a:spcAft>
-            </a:pPr>
-            <a:r>
-              <a:rPr sz="900" b="1">
-                <a:solidFill>
-                  <a:srgbClr val="F43F5E"/>
-                </a:solidFill>
-                <a:latin typeface="NanumGothic"/>
-                <a:ea typeface="NanumGothic"/>
-                <a:cs typeface="NanumGothic"/>
-              </a:rPr>
-              <a:t>Day 5 · 금</a:t>
-            </a:r>
-          </a:p>
-        </p:txBody>
-      </p:sp>
-      <p:sp>
-        <p:nvSpPr>
-          <p:cNvPr id="9" name="Rounded Rectangle 8"/>
+          <p:cNvPr id="8" name="Rounded Rectangle 7"/>
           <p:cNvSpPr/>
           <p:nvPr/>
         </p:nvSpPr>
@@ -10570,7 +10647,7 @@
       </p:sp>
       <p:sp>
         <p:nvSpPr>
-          <p:cNvPr id="10" name="TextBox 9"/>
+          <p:cNvPr id="9" name="TextBox 8"/>
           <p:cNvSpPr txBox="1"/>
           <p:nvPr/>
         </p:nvSpPr>
@@ -10617,7 +10694,7 @@
       </p:sp>
       <p:sp>
         <p:nvSpPr>
-          <p:cNvPr id="11" name="Oval 10"/>
+          <p:cNvPr id="10" name="Oval 9"/>
           <p:cNvSpPr/>
           <p:nvPr/>
         </p:nvSpPr>
@@ -10661,7 +10738,7 @@
       </p:sp>
       <p:sp>
         <p:nvSpPr>
-          <p:cNvPr id="12" name="TextBox 11"/>
+          <p:cNvPr id="11" name="TextBox 10"/>
           <p:cNvSpPr txBox="1"/>
           <p:nvPr/>
         </p:nvSpPr>
@@ -10708,7 +10785,7 @@
       </p:sp>
       <p:sp>
         <p:nvSpPr>
-          <p:cNvPr id="13" name="TextBox 12"/>
+          <p:cNvPr id="12" name="TextBox 11"/>
           <p:cNvSpPr txBox="1"/>
           <p:nvPr/>
         </p:nvSpPr>
@@ -10755,7 +10832,7 @@
       </p:sp>
       <p:sp>
         <p:nvSpPr>
-          <p:cNvPr id="14" name="Oval 13"/>
+          <p:cNvPr id="13" name="Oval 12"/>
           <p:cNvSpPr/>
           <p:nvPr/>
         </p:nvSpPr>
@@ -10799,7 +10876,7 @@
       </p:sp>
       <p:sp>
         <p:nvSpPr>
-          <p:cNvPr id="15" name="TextBox 14"/>
+          <p:cNvPr id="14" name="TextBox 13"/>
           <p:cNvSpPr txBox="1"/>
           <p:nvPr/>
         </p:nvSpPr>
@@ -10846,7 +10923,7 @@
       </p:sp>
       <p:sp>
         <p:nvSpPr>
-          <p:cNvPr id="16" name="TextBox 15"/>
+          <p:cNvPr id="15" name="TextBox 14"/>
           <p:cNvSpPr txBox="1"/>
           <p:nvPr/>
         </p:nvSpPr>
@@ -10893,7 +10970,7 @@
       </p:sp>
       <p:sp>
         <p:nvSpPr>
-          <p:cNvPr id="17" name="Oval 16"/>
+          <p:cNvPr id="16" name="Oval 15"/>
           <p:cNvSpPr/>
           <p:nvPr/>
         </p:nvSpPr>
@@ -10937,7 +11014,7 @@
       </p:sp>
       <p:sp>
         <p:nvSpPr>
-          <p:cNvPr id="18" name="TextBox 17"/>
+          <p:cNvPr id="17" name="TextBox 16"/>
           <p:cNvSpPr txBox="1"/>
           <p:nvPr/>
         </p:nvSpPr>
@@ -10984,7 +11061,7 @@
       </p:sp>
       <p:sp>
         <p:nvSpPr>
-          <p:cNvPr id="19" name="TextBox 18"/>
+          <p:cNvPr id="18" name="TextBox 17"/>
           <p:cNvSpPr txBox="1"/>
           <p:nvPr/>
         </p:nvSpPr>
@@ -11031,7 +11108,7 @@
       </p:sp>
       <p:sp>
         <p:nvSpPr>
-          <p:cNvPr id="20" name="Oval 19"/>
+          <p:cNvPr id="19" name="Oval 18"/>
           <p:cNvSpPr/>
           <p:nvPr/>
         </p:nvSpPr>
@@ -11075,7 +11152,7 @@
       </p:sp>
       <p:sp>
         <p:nvSpPr>
-          <p:cNvPr id="21" name="TextBox 20"/>
+          <p:cNvPr id="20" name="TextBox 19"/>
           <p:cNvSpPr txBox="1"/>
           <p:nvPr/>
         </p:nvSpPr>
@@ -11122,7 +11199,7 @@
       </p:sp>
       <p:sp>
         <p:nvSpPr>
-          <p:cNvPr id="22" name="TextBox 21"/>
+          <p:cNvPr id="21" name="TextBox 20"/>
           <p:cNvSpPr txBox="1"/>
           <p:nvPr/>
         </p:nvSpPr>
@@ -11169,7 +11246,7 @@
       </p:sp>
       <p:sp>
         <p:nvSpPr>
-          <p:cNvPr id="23" name="Rounded Rectangle 22"/>
+          <p:cNvPr id="22" name="Rounded Rectangle 21"/>
           <p:cNvSpPr/>
           <p:nvPr/>
         </p:nvSpPr>
@@ -11213,7 +11290,7 @@
       </p:sp>
       <p:sp>
         <p:nvSpPr>
-          <p:cNvPr id="24" name="TextBox 23"/>
+          <p:cNvPr id="23" name="TextBox 22"/>
           <p:cNvSpPr txBox="1"/>
           <p:nvPr/>
         </p:nvSpPr>
@@ -11260,7 +11337,7 @@
       </p:sp>
       <p:sp>
         <p:nvSpPr>
-          <p:cNvPr id="25" name="TextBox 24"/>
+          <p:cNvPr id="24" name="TextBox 23"/>
           <p:cNvSpPr txBox="1"/>
           <p:nvPr/>
         </p:nvSpPr>
@@ -11302,6 +11379,64 @@
               </a:rPr>
               <a:t>발표 슬라이드 + 가설 제안서 초안
 제안서 양식: examples/research-agent/output/report-template.md</a:t>
+            </a:r>
+          </a:p>
+        </p:txBody>
+      </p:sp>
+      <p:sp>
+        <p:nvSpPr>
+          <p:cNvPr id="25" name="TextBox 24"/>
+          <p:cNvSpPr txBox="1"/>
+          <p:nvPr/>
+        </p:nvSpPr>
+        <p:spPr>
+          <a:xfrm>
+            <a:off x="8988552" y="6419088"/>
+            <a:ext cx="2697480" cy="365760"/>
+          </a:xfrm>
+          <a:prstGeom prst="rect">
+            <a:avLst/>
+          </a:prstGeom>
+          <a:noFill/>
+        </p:spPr>
+        <p:txBody>
+          <a:bodyPr wrap="square" anchor="ctr" lIns="0" rIns="0" tIns="0" bIns="0">
+            <a:spAutoFit/>
+          </a:bodyPr>
+          <a:lstStyle/>
+          <a:p>
+            <a:pPr algn="r">
+              <a:lnSpc>
+                <a:spcPct val="100000"/>
+              </a:lnSpc>
+              <a:spcBef>
+                <a:spcPts val="0"/>
+              </a:spcBef>
+              <a:spcAft>
+                <a:spcPts val="600"/>
+              </a:spcAft>
+            </a:pPr>
+            <a:r>
+              <a:rPr sz="900" b="1">
+                <a:solidFill>
+                  <a:srgbClr val="F43F5E"/>
+                </a:solidFill>
+                <a:latin typeface="NanumGothic"/>
+                <a:ea typeface="NanumGothic"/>
+                <a:cs typeface="NanumGothic"/>
+              </a:rPr>
+              <a:t>Day 5 · 금</a:t>
+            </a:r>
+            <a:r>
+              <a:rPr sz="900" b="1">
+                <a:solidFill>
+                  <a:srgbClr val="64748B"/>
+                </a:solidFill>
+                <a:latin typeface="NanumGothic"/>
+                <a:ea typeface="NanumGothic"/>
+                <a:cs typeface="NanumGothic"/>
+              </a:rPr>
+              <a:t>   ·   16 / 21</a:t>
             </a:r>
           </a:p>
         </p:txBody>
@@ -11608,6 +11743,64 @@
           </a:p>
         </p:txBody>
       </p:sp>
+      <p:sp>
+        <p:nvSpPr>
+          <p:cNvPr id="8" name="TextBox 7"/>
+          <p:cNvSpPr txBox="1"/>
+          <p:nvPr/>
+        </p:nvSpPr>
+        <p:spPr>
+          <a:xfrm>
+            <a:off x="8988552" y="6419088"/>
+            <a:ext cx="2697480" cy="365760"/>
+          </a:xfrm>
+          <a:prstGeom prst="rect">
+            <a:avLst/>
+          </a:prstGeom>
+          <a:noFill/>
+        </p:spPr>
+        <p:txBody>
+          <a:bodyPr wrap="square" anchor="ctr" lIns="0" rIns="0" tIns="0" bIns="0">
+            <a:spAutoFit/>
+          </a:bodyPr>
+          <a:lstStyle/>
+          <a:p>
+            <a:pPr algn="r">
+              <a:lnSpc>
+                <a:spcPct val="100000"/>
+              </a:lnSpc>
+              <a:spcBef>
+                <a:spcPts val="0"/>
+              </a:spcBef>
+              <a:spcAft>
+                <a:spcPts val="600"/>
+              </a:spcAft>
+            </a:pPr>
+            <a:r>
+              <a:rPr sz="900" b="1">
+                <a:solidFill>
+                  <a:srgbClr val="F43F5E"/>
+                </a:solidFill>
+                <a:latin typeface="NanumGothic"/>
+                <a:ea typeface="NanumGothic"/>
+                <a:cs typeface="NanumGothic"/>
+              </a:rPr>
+              <a:t>Day 5 · 금</a:t>
+            </a:r>
+            <a:r>
+              <a:rPr sz="900" b="1">
+                <a:solidFill>
+                  <a:srgbClr val="CBD5E1"/>
+                </a:solidFill>
+                <a:latin typeface="NanumGothic"/>
+                <a:ea typeface="NanumGothic"/>
+                <a:cs typeface="NanumGothic"/>
+              </a:rPr>
+              <a:t>   ·   17 / 21</a:t>
+            </a:r>
+          </a:p>
+        </p:txBody>
+      </p:sp>
     </p:spTree>
   </p:cSld>
   <p:clrMapOvr>
@@ -11901,54 +12094,7 @@
       </p:sp>
       <p:sp>
         <p:nvSpPr>
-          <p:cNvPr id="8" name="TextBox 7"/>
-          <p:cNvSpPr txBox="1"/>
-          <p:nvPr/>
-        </p:nvSpPr>
-        <p:spPr>
-          <a:xfrm>
-            <a:off x="10241280" y="6419088"/>
-            <a:ext cx="1463040" cy="365760"/>
-          </a:xfrm>
-          <a:prstGeom prst="rect">
-            <a:avLst/>
-          </a:prstGeom>
-          <a:noFill/>
-        </p:spPr>
-        <p:txBody>
-          <a:bodyPr wrap="square" anchor="ctr" lIns="0" rIns="0" tIns="0" bIns="0">
-            <a:spAutoFit/>
-          </a:bodyPr>
-          <a:lstStyle/>
-          <a:p>
-            <a:pPr algn="r">
-              <a:lnSpc>
-                <a:spcPct val="100000"/>
-              </a:lnSpc>
-              <a:spcBef>
-                <a:spcPts val="0"/>
-              </a:spcBef>
-              <a:spcAft>
-                <a:spcPts val="600"/>
-              </a:spcAft>
-            </a:pPr>
-            <a:r>
-              <a:rPr sz="900" b="1">
-                <a:solidFill>
-                  <a:srgbClr val="F43F5E"/>
-                </a:solidFill>
-                <a:latin typeface="NanumGothic"/>
-                <a:ea typeface="NanumGothic"/>
-                <a:cs typeface="NanumGothic"/>
-              </a:rPr>
-              <a:t>Day 5 · 금</a:t>
-            </a:r>
-          </a:p>
-        </p:txBody>
-      </p:sp>
-      <p:sp>
-        <p:nvSpPr>
-          <p:cNvPr id="9" name="Rounded Rectangle 8"/>
+          <p:cNvPr id="8" name="Rounded Rectangle 7"/>
           <p:cNvSpPr/>
           <p:nvPr/>
         </p:nvSpPr>
@@ -11994,7 +12140,7 @@
       </p:sp>
       <p:sp>
         <p:nvSpPr>
-          <p:cNvPr id="10" name="TextBox 9"/>
+          <p:cNvPr id="9" name="TextBox 8"/>
           <p:cNvSpPr txBox="1"/>
           <p:nvPr/>
         </p:nvSpPr>
@@ -12041,7 +12187,7 @@
       </p:sp>
       <p:sp>
         <p:nvSpPr>
-          <p:cNvPr id="11" name="TextBox 10"/>
+          <p:cNvPr id="10" name="TextBox 9"/>
           <p:cNvSpPr txBox="1"/>
           <p:nvPr/>
         </p:nvSpPr>
@@ -12088,7 +12234,7 @@
       </p:sp>
       <p:sp>
         <p:nvSpPr>
-          <p:cNvPr id="12" name="Rounded Rectangle 11"/>
+          <p:cNvPr id="11" name="Rounded Rectangle 10"/>
           <p:cNvSpPr/>
           <p:nvPr/>
         </p:nvSpPr>
@@ -12134,7 +12280,7 @@
       </p:sp>
       <p:sp>
         <p:nvSpPr>
-          <p:cNvPr id="13" name="Oval 12"/>
+          <p:cNvPr id="12" name="Oval 11"/>
           <p:cNvSpPr/>
           <p:nvPr/>
         </p:nvSpPr>
@@ -12178,7 +12324,7 @@
       </p:sp>
       <p:sp>
         <p:nvSpPr>
-          <p:cNvPr id="14" name="TextBox 13"/>
+          <p:cNvPr id="13" name="TextBox 12"/>
           <p:cNvSpPr txBox="1"/>
           <p:nvPr/>
         </p:nvSpPr>
@@ -12225,7 +12371,7 @@
       </p:sp>
       <p:sp>
         <p:nvSpPr>
-          <p:cNvPr id="15" name="TextBox 14"/>
+          <p:cNvPr id="14" name="TextBox 13"/>
           <p:cNvSpPr txBox="1"/>
           <p:nvPr/>
         </p:nvSpPr>
@@ -12272,7 +12418,7 @@
       </p:sp>
       <p:sp>
         <p:nvSpPr>
-          <p:cNvPr id="16" name="Rounded Rectangle 15"/>
+          <p:cNvPr id="15" name="Rounded Rectangle 14"/>
           <p:cNvSpPr/>
           <p:nvPr/>
         </p:nvSpPr>
@@ -12318,7 +12464,7 @@
       </p:sp>
       <p:sp>
         <p:nvSpPr>
-          <p:cNvPr id="17" name="Oval 16"/>
+          <p:cNvPr id="16" name="Oval 15"/>
           <p:cNvSpPr/>
           <p:nvPr/>
         </p:nvSpPr>
@@ -12362,7 +12508,7 @@
       </p:sp>
       <p:sp>
         <p:nvSpPr>
-          <p:cNvPr id="18" name="TextBox 17"/>
+          <p:cNvPr id="17" name="TextBox 16"/>
           <p:cNvSpPr txBox="1"/>
           <p:nvPr/>
         </p:nvSpPr>
@@ -12409,7 +12555,7 @@
       </p:sp>
       <p:sp>
         <p:nvSpPr>
-          <p:cNvPr id="19" name="TextBox 18"/>
+          <p:cNvPr id="18" name="TextBox 17"/>
           <p:cNvSpPr txBox="1"/>
           <p:nvPr/>
         </p:nvSpPr>
@@ -12450,6 +12596,64 @@
                 <a:cs typeface="NanumGothic"/>
               </a:rPr>
               <a:t>과정 회고 및 향후 계획</a:t>
+            </a:r>
+          </a:p>
+        </p:txBody>
+      </p:sp>
+      <p:sp>
+        <p:nvSpPr>
+          <p:cNvPr id="19" name="TextBox 18"/>
+          <p:cNvSpPr txBox="1"/>
+          <p:nvPr/>
+        </p:nvSpPr>
+        <p:spPr>
+          <a:xfrm>
+            <a:off x="8988552" y="6419088"/>
+            <a:ext cx="2697480" cy="365760"/>
+          </a:xfrm>
+          <a:prstGeom prst="rect">
+            <a:avLst/>
+          </a:prstGeom>
+          <a:noFill/>
+        </p:spPr>
+        <p:txBody>
+          <a:bodyPr wrap="square" anchor="ctr" lIns="0" rIns="0" tIns="0" bIns="0">
+            <a:spAutoFit/>
+          </a:bodyPr>
+          <a:lstStyle/>
+          <a:p>
+            <a:pPr algn="r">
+              <a:lnSpc>
+                <a:spcPct val="100000"/>
+              </a:lnSpc>
+              <a:spcBef>
+                <a:spcPts val="0"/>
+              </a:spcBef>
+              <a:spcAft>
+                <a:spcPts val="600"/>
+              </a:spcAft>
+            </a:pPr>
+            <a:r>
+              <a:rPr sz="900" b="1">
+                <a:solidFill>
+                  <a:srgbClr val="F43F5E"/>
+                </a:solidFill>
+                <a:latin typeface="NanumGothic"/>
+                <a:ea typeface="NanumGothic"/>
+                <a:cs typeface="NanumGothic"/>
+              </a:rPr>
+              <a:t>Day 5 · 금</a:t>
+            </a:r>
+            <a:r>
+              <a:rPr sz="900" b="1">
+                <a:solidFill>
+                  <a:srgbClr val="64748B"/>
+                </a:solidFill>
+                <a:latin typeface="NanumGothic"/>
+                <a:ea typeface="NanumGothic"/>
+                <a:cs typeface="NanumGothic"/>
+              </a:rPr>
+              <a:t>   ·   18 / 21</a:t>
             </a:r>
           </a:p>
         </p:txBody>
@@ -12747,54 +12951,7 @@
       </p:sp>
       <p:sp>
         <p:nvSpPr>
-          <p:cNvPr id="8" name="TextBox 7"/>
-          <p:cNvSpPr txBox="1"/>
-          <p:nvPr/>
-        </p:nvSpPr>
-        <p:spPr>
-          <a:xfrm>
-            <a:off x="10241280" y="6419088"/>
-            <a:ext cx="1463040" cy="365760"/>
-          </a:xfrm>
-          <a:prstGeom prst="rect">
-            <a:avLst/>
-          </a:prstGeom>
-          <a:noFill/>
-        </p:spPr>
-        <p:txBody>
-          <a:bodyPr wrap="square" anchor="ctr" lIns="0" rIns="0" tIns="0" bIns="0">
-            <a:spAutoFit/>
-          </a:bodyPr>
-          <a:lstStyle/>
-          <a:p>
-            <a:pPr algn="r">
-              <a:lnSpc>
-                <a:spcPct val="100000"/>
-              </a:lnSpc>
-              <a:spcBef>
-                <a:spcPts val="0"/>
-              </a:spcBef>
-              <a:spcAft>
-                <a:spcPts val="600"/>
-              </a:spcAft>
-            </a:pPr>
-            <a:r>
-              <a:rPr sz="900" b="1">
-                <a:solidFill>
-                  <a:srgbClr val="F43F5E"/>
-                </a:solidFill>
-                <a:latin typeface="NanumGothic"/>
-                <a:ea typeface="NanumGothic"/>
-                <a:cs typeface="NanumGothic"/>
-              </a:rPr>
-              <a:t>Day 5 · 금</a:t>
-            </a:r>
-          </a:p>
-        </p:txBody>
-      </p:sp>
-      <p:sp>
-        <p:nvSpPr>
-          <p:cNvPr id="9" name="Oval 8"/>
+          <p:cNvPr id="8" name="Oval 7"/>
           <p:cNvSpPr/>
           <p:nvPr/>
         </p:nvSpPr>
@@ -12838,7 +12995,7 @@
       </p:sp>
       <p:sp>
         <p:nvSpPr>
-          <p:cNvPr id="10" name="TextBox 9"/>
+          <p:cNvPr id="9" name="TextBox 8"/>
           <p:cNvSpPr txBox="1"/>
           <p:nvPr/>
         </p:nvSpPr>
@@ -12885,7 +13042,7 @@
       </p:sp>
       <p:sp>
         <p:nvSpPr>
-          <p:cNvPr id="11" name="TextBox 10"/>
+          <p:cNvPr id="10" name="TextBox 9"/>
           <p:cNvSpPr txBox="1"/>
           <p:nvPr/>
         </p:nvSpPr>
@@ -12932,7 +13089,7 @@
       </p:sp>
       <p:sp>
         <p:nvSpPr>
-          <p:cNvPr id="12" name="Oval 11"/>
+          <p:cNvPr id="11" name="Oval 10"/>
           <p:cNvSpPr/>
           <p:nvPr/>
         </p:nvSpPr>
@@ -12976,7 +13133,7 @@
       </p:sp>
       <p:sp>
         <p:nvSpPr>
-          <p:cNvPr id="13" name="TextBox 12"/>
+          <p:cNvPr id="12" name="TextBox 11"/>
           <p:cNvSpPr txBox="1"/>
           <p:nvPr/>
         </p:nvSpPr>
@@ -13023,7 +13180,7 @@
       </p:sp>
       <p:sp>
         <p:nvSpPr>
-          <p:cNvPr id="14" name="TextBox 13"/>
+          <p:cNvPr id="13" name="TextBox 12"/>
           <p:cNvSpPr txBox="1"/>
           <p:nvPr/>
         </p:nvSpPr>
@@ -13070,7 +13227,7 @@
       </p:sp>
       <p:sp>
         <p:nvSpPr>
-          <p:cNvPr id="15" name="Oval 14"/>
+          <p:cNvPr id="14" name="Oval 13"/>
           <p:cNvSpPr/>
           <p:nvPr/>
         </p:nvSpPr>
@@ -13114,7 +13271,7 @@
       </p:sp>
       <p:sp>
         <p:nvSpPr>
-          <p:cNvPr id="16" name="TextBox 15"/>
+          <p:cNvPr id="15" name="TextBox 14"/>
           <p:cNvSpPr txBox="1"/>
           <p:nvPr/>
         </p:nvSpPr>
@@ -13161,7 +13318,7 @@
       </p:sp>
       <p:sp>
         <p:nvSpPr>
-          <p:cNvPr id="17" name="TextBox 16"/>
+          <p:cNvPr id="16" name="TextBox 15"/>
           <p:cNvSpPr txBox="1"/>
           <p:nvPr/>
         </p:nvSpPr>
@@ -13202,6 +13359,64 @@
                 <a:cs typeface="NanumGothic"/>
               </a:rPr>
               <a:t>잘한 점 · 배운 점 · 다음 단계</a:t>
+            </a:r>
+          </a:p>
+        </p:txBody>
+      </p:sp>
+      <p:sp>
+        <p:nvSpPr>
+          <p:cNvPr id="17" name="TextBox 16"/>
+          <p:cNvSpPr txBox="1"/>
+          <p:nvPr/>
+        </p:nvSpPr>
+        <p:spPr>
+          <a:xfrm>
+            <a:off x="8988552" y="6419088"/>
+            <a:ext cx="2697480" cy="365760"/>
+          </a:xfrm>
+          <a:prstGeom prst="rect">
+            <a:avLst/>
+          </a:prstGeom>
+          <a:noFill/>
+        </p:spPr>
+        <p:txBody>
+          <a:bodyPr wrap="square" anchor="ctr" lIns="0" rIns="0" tIns="0" bIns="0">
+            <a:spAutoFit/>
+          </a:bodyPr>
+          <a:lstStyle/>
+          <a:p>
+            <a:pPr algn="r">
+              <a:lnSpc>
+                <a:spcPct val="100000"/>
+              </a:lnSpc>
+              <a:spcBef>
+                <a:spcPts val="0"/>
+              </a:spcBef>
+              <a:spcAft>
+                <a:spcPts val="600"/>
+              </a:spcAft>
+            </a:pPr>
+            <a:r>
+              <a:rPr sz="900" b="1">
+                <a:solidFill>
+                  <a:srgbClr val="F43F5E"/>
+                </a:solidFill>
+                <a:latin typeface="NanumGothic"/>
+                <a:ea typeface="NanumGothic"/>
+                <a:cs typeface="NanumGothic"/>
+              </a:rPr>
+              <a:t>Day 5 · 금</a:t>
+            </a:r>
+            <a:r>
+              <a:rPr sz="900" b="1">
+                <a:solidFill>
+                  <a:srgbClr val="64748B"/>
+                </a:solidFill>
+                <a:latin typeface="NanumGothic"/>
+                <a:ea typeface="NanumGothic"/>
+                <a:cs typeface="NanumGothic"/>
+              </a:rPr>
+              <a:t>   ·   19 / 21</a:t>
             </a:r>
           </a:p>
         </p:txBody>
@@ -13499,54 +13714,7 @@
       </p:sp>
       <p:sp>
         <p:nvSpPr>
-          <p:cNvPr id="8" name="TextBox 7"/>
-          <p:cNvSpPr txBox="1"/>
-          <p:nvPr/>
-        </p:nvSpPr>
-        <p:spPr>
-          <a:xfrm>
-            <a:off x="10241280" y="6419088"/>
-            <a:ext cx="1463040" cy="365760"/>
-          </a:xfrm>
-          <a:prstGeom prst="rect">
-            <a:avLst/>
-          </a:prstGeom>
-          <a:noFill/>
-        </p:spPr>
-        <p:txBody>
-          <a:bodyPr wrap="square" anchor="ctr" lIns="0" rIns="0" tIns="0" bIns="0">
-            <a:spAutoFit/>
-          </a:bodyPr>
-          <a:lstStyle/>
-          <a:p>
-            <a:pPr algn="r">
-              <a:lnSpc>
-                <a:spcPct val="100000"/>
-              </a:lnSpc>
-              <a:spcBef>
-                <a:spcPts val="0"/>
-              </a:spcBef>
-              <a:spcAft>
-                <a:spcPts val="600"/>
-              </a:spcAft>
-            </a:pPr>
-            <a:r>
-              <a:rPr sz="900" b="1">
-                <a:solidFill>
-                  <a:srgbClr val="F43F5E"/>
-                </a:solidFill>
-                <a:latin typeface="NanumGothic"/>
-                <a:ea typeface="NanumGothic"/>
-                <a:cs typeface="NanumGothic"/>
-              </a:rPr>
-              <a:t>Day 5 · 금</a:t>
-            </a:r>
-          </a:p>
-        </p:txBody>
-      </p:sp>
-      <p:sp>
-        <p:nvSpPr>
-          <p:cNvPr id="9" name="Rounded Rectangle 8"/>
+          <p:cNvPr id="8" name="Rounded Rectangle 7"/>
           <p:cNvSpPr/>
           <p:nvPr/>
         </p:nvSpPr>
@@ -13592,7 +13760,7 @@
       </p:sp>
       <p:sp>
         <p:nvSpPr>
-          <p:cNvPr id="10" name="TextBox 9"/>
+          <p:cNvPr id="9" name="TextBox 8"/>
           <p:cNvSpPr txBox="1"/>
           <p:nvPr/>
         </p:nvSpPr>
@@ -13663,7 +13831,7 @@
       </p:sp>
       <p:sp>
         <p:nvSpPr>
-          <p:cNvPr id="11" name="TextBox 10"/>
+          <p:cNvPr id="10" name="TextBox 9"/>
           <p:cNvSpPr txBox="1"/>
           <p:nvPr/>
         </p:nvSpPr>
@@ -13710,7 +13878,7 @@
       </p:sp>
       <p:sp>
         <p:nvSpPr>
-          <p:cNvPr id="12" name="Rounded Rectangle 11"/>
+          <p:cNvPr id="11" name="Rounded Rectangle 10"/>
           <p:cNvSpPr/>
           <p:nvPr/>
         </p:nvSpPr>
@@ -13756,7 +13924,7 @@
       </p:sp>
       <p:sp>
         <p:nvSpPr>
-          <p:cNvPr id="13" name="TextBox 12"/>
+          <p:cNvPr id="12" name="TextBox 11"/>
           <p:cNvSpPr txBox="1"/>
           <p:nvPr/>
         </p:nvSpPr>
@@ -13827,7 +13995,7 @@
       </p:sp>
       <p:sp>
         <p:nvSpPr>
-          <p:cNvPr id="14" name="TextBox 13"/>
+          <p:cNvPr id="13" name="TextBox 12"/>
           <p:cNvSpPr txBox="1"/>
           <p:nvPr/>
         </p:nvSpPr>
@@ -13874,7 +14042,7 @@
       </p:sp>
       <p:sp>
         <p:nvSpPr>
-          <p:cNvPr id="15" name="Rounded Rectangle 14"/>
+          <p:cNvPr id="14" name="Rounded Rectangle 13"/>
           <p:cNvSpPr/>
           <p:nvPr/>
         </p:nvSpPr>
@@ -13920,7 +14088,7 @@
       </p:sp>
       <p:sp>
         <p:nvSpPr>
-          <p:cNvPr id="16" name="TextBox 15"/>
+          <p:cNvPr id="15" name="TextBox 14"/>
           <p:cNvSpPr txBox="1"/>
           <p:nvPr/>
         </p:nvSpPr>
@@ -13991,7 +14159,7 @@
       </p:sp>
       <p:sp>
         <p:nvSpPr>
-          <p:cNvPr id="17" name="TextBox 16"/>
+          <p:cNvPr id="16" name="TextBox 15"/>
           <p:cNvSpPr txBox="1"/>
           <p:nvPr/>
         </p:nvSpPr>
@@ -14038,7 +14206,7 @@
       </p:sp>
       <p:sp>
         <p:nvSpPr>
-          <p:cNvPr id="18" name="Rounded Rectangle 17"/>
+          <p:cNvPr id="17" name="Rounded Rectangle 16"/>
           <p:cNvSpPr/>
           <p:nvPr/>
         </p:nvSpPr>
@@ -14084,7 +14252,7 @@
       </p:sp>
       <p:sp>
         <p:nvSpPr>
-          <p:cNvPr id="19" name="TextBox 18"/>
+          <p:cNvPr id="18" name="TextBox 17"/>
           <p:cNvSpPr txBox="1"/>
           <p:nvPr/>
         </p:nvSpPr>
@@ -14155,7 +14323,7 @@
       </p:sp>
       <p:sp>
         <p:nvSpPr>
-          <p:cNvPr id="20" name="TextBox 19"/>
+          <p:cNvPr id="19" name="TextBox 18"/>
           <p:cNvSpPr txBox="1"/>
           <p:nvPr/>
         </p:nvSpPr>
@@ -14202,7 +14370,7 @@
       </p:sp>
       <p:sp>
         <p:nvSpPr>
-          <p:cNvPr id="21" name="Rounded Rectangle 20"/>
+          <p:cNvPr id="20" name="Rounded Rectangle 19"/>
           <p:cNvSpPr/>
           <p:nvPr/>
         </p:nvSpPr>
@@ -14246,7 +14414,7 @@
       </p:sp>
       <p:sp>
         <p:nvSpPr>
-          <p:cNvPr id="22" name="TextBox 21"/>
+          <p:cNvPr id="21" name="TextBox 20"/>
           <p:cNvSpPr txBox="1"/>
           <p:nvPr/>
         </p:nvSpPr>
@@ -14317,7 +14485,7 @@
       </p:sp>
       <p:sp>
         <p:nvSpPr>
-          <p:cNvPr id="23" name="TextBox 22"/>
+          <p:cNvPr id="22" name="TextBox 21"/>
           <p:cNvSpPr txBox="1"/>
           <p:nvPr/>
         </p:nvSpPr>
@@ -14364,7 +14532,7 @@
       </p:sp>
       <p:sp>
         <p:nvSpPr>
-          <p:cNvPr id="24" name="TextBox 23"/>
+          <p:cNvPr id="23" name="TextBox 22"/>
           <p:cNvSpPr txBox="1"/>
           <p:nvPr/>
         </p:nvSpPr>
@@ -14411,7 +14579,7 @@
       </p:sp>
       <p:sp>
         <p:nvSpPr>
-          <p:cNvPr id="25" name="TextBox 24"/>
+          <p:cNvPr id="24" name="TextBox 23"/>
           <p:cNvSpPr txBox="1"/>
           <p:nvPr/>
         </p:nvSpPr>
@@ -14463,6 +14631,64 @@
                 <a:cs typeface="NanumGothic"/>
               </a:rPr>
               <a:t>이론 → 도구 → 실전 → 결과 → 발표</a:t>
+            </a:r>
+          </a:p>
+        </p:txBody>
+      </p:sp>
+      <p:sp>
+        <p:nvSpPr>
+          <p:cNvPr id="25" name="TextBox 24"/>
+          <p:cNvSpPr txBox="1"/>
+          <p:nvPr/>
+        </p:nvSpPr>
+        <p:spPr>
+          <a:xfrm>
+            <a:off x="8988552" y="6419088"/>
+            <a:ext cx="2697480" cy="365760"/>
+          </a:xfrm>
+          <a:prstGeom prst="rect">
+            <a:avLst/>
+          </a:prstGeom>
+          <a:noFill/>
+        </p:spPr>
+        <p:txBody>
+          <a:bodyPr wrap="square" anchor="ctr" lIns="0" rIns="0" tIns="0" bIns="0">
+            <a:spAutoFit/>
+          </a:bodyPr>
+          <a:lstStyle/>
+          <a:p>
+            <a:pPr algn="r">
+              <a:lnSpc>
+                <a:spcPct val="100000"/>
+              </a:lnSpc>
+              <a:spcBef>
+                <a:spcPts val="0"/>
+              </a:spcBef>
+              <a:spcAft>
+                <a:spcPts val="600"/>
+              </a:spcAft>
+            </a:pPr>
+            <a:r>
+              <a:rPr sz="900" b="1">
+                <a:solidFill>
+                  <a:srgbClr val="F43F5E"/>
+                </a:solidFill>
+                <a:latin typeface="NanumGothic"/>
+                <a:ea typeface="NanumGothic"/>
+                <a:cs typeface="NanumGothic"/>
+              </a:rPr>
+              <a:t>Day 5 · 금</a:t>
+            </a:r>
+            <a:r>
+              <a:rPr sz="900" b="1">
+                <a:solidFill>
+                  <a:srgbClr val="64748B"/>
+                </a:solidFill>
+                <a:latin typeface="NanumGothic"/>
+                <a:ea typeface="NanumGothic"/>
+                <a:cs typeface="NanumGothic"/>
+              </a:rPr>
+              <a:t>   ·   2 / 21</a:t>
             </a:r>
           </a:p>
         </p:txBody>
@@ -14760,54 +14986,7 @@
       </p:sp>
       <p:sp>
         <p:nvSpPr>
-          <p:cNvPr id="8" name="TextBox 7"/>
-          <p:cNvSpPr txBox="1"/>
-          <p:nvPr/>
-        </p:nvSpPr>
-        <p:spPr>
-          <a:xfrm>
-            <a:off x="10241280" y="6419088"/>
-            <a:ext cx="1463040" cy="365760"/>
-          </a:xfrm>
-          <a:prstGeom prst="rect">
-            <a:avLst/>
-          </a:prstGeom>
-          <a:noFill/>
-        </p:spPr>
-        <p:txBody>
-          <a:bodyPr wrap="square" anchor="ctr" lIns="0" rIns="0" tIns="0" bIns="0">
-            <a:spAutoFit/>
-          </a:bodyPr>
-          <a:lstStyle/>
-          <a:p>
-            <a:pPr algn="r">
-              <a:lnSpc>
-                <a:spcPct val="100000"/>
-              </a:lnSpc>
-              <a:spcBef>
-                <a:spcPts val="0"/>
-              </a:spcBef>
-              <a:spcAft>
-                <a:spcPts val="600"/>
-              </a:spcAft>
-            </a:pPr>
-            <a:r>
-              <a:rPr sz="900" b="1">
-                <a:solidFill>
-                  <a:srgbClr val="F43F5E"/>
-                </a:solidFill>
-                <a:latin typeface="NanumGothic"/>
-                <a:ea typeface="NanumGothic"/>
-                <a:cs typeface="NanumGothic"/>
-              </a:rPr>
-              <a:t>Day 5 · 금</a:t>
-            </a:r>
-          </a:p>
-        </p:txBody>
-      </p:sp>
-      <p:sp>
-        <p:nvSpPr>
-          <p:cNvPr id="9" name="Oval 8"/>
+          <p:cNvPr id="8" name="Oval 7"/>
           <p:cNvSpPr/>
           <p:nvPr/>
         </p:nvSpPr>
@@ -14851,7 +15030,7 @@
       </p:sp>
       <p:sp>
         <p:nvSpPr>
-          <p:cNvPr id="10" name="TextBox 9"/>
+          <p:cNvPr id="9" name="TextBox 8"/>
           <p:cNvSpPr txBox="1"/>
           <p:nvPr/>
         </p:nvSpPr>
@@ -14898,7 +15077,7 @@
       </p:sp>
       <p:sp>
         <p:nvSpPr>
-          <p:cNvPr id="11" name="TextBox 10"/>
+          <p:cNvPr id="10" name="TextBox 9"/>
           <p:cNvSpPr txBox="1"/>
           <p:nvPr/>
         </p:nvSpPr>
@@ -14945,7 +15124,7 @@
       </p:sp>
       <p:sp>
         <p:nvSpPr>
-          <p:cNvPr id="12" name="Oval 11"/>
+          <p:cNvPr id="11" name="Oval 10"/>
           <p:cNvSpPr/>
           <p:nvPr/>
         </p:nvSpPr>
@@ -14989,7 +15168,7 @@
       </p:sp>
       <p:sp>
         <p:nvSpPr>
-          <p:cNvPr id="13" name="TextBox 12"/>
+          <p:cNvPr id="12" name="TextBox 11"/>
           <p:cNvSpPr txBox="1"/>
           <p:nvPr/>
         </p:nvSpPr>
@@ -15036,7 +15215,7 @@
       </p:sp>
       <p:sp>
         <p:nvSpPr>
-          <p:cNvPr id="14" name="TextBox 13"/>
+          <p:cNvPr id="13" name="TextBox 12"/>
           <p:cNvSpPr txBox="1"/>
           <p:nvPr/>
         </p:nvSpPr>
@@ -15083,7 +15262,7 @@
       </p:sp>
       <p:sp>
         <p:nvSpPr>
-          <p:cNvPr id="15" name="Oval 14"/>
+          <p:cNvPr id="14" name="Oval 13"/>
           <p:cNvSpPr/>
           <p:nvPr/>
         </p:nvSpPr>
@@ -15127,7 +15306,7 @@
       </p:sp>
       <p:sp>
         <p:nvSpPr>
-          <p:cNvPr id="16" name="TextBox 15"/>
+          <p:cNvPr id="15" name="TextBox 14"/>
           <p:cNvSpPr txBox="1"/>
           <p:nvPr/>
         </p:nvSpPr>
@@ -15174,7 +15353,7 @@
       </p:sp>
       <p:sp>
         <p:nvSpPr>
-          <p:cNvPr id="17" name="TextBox 16"/>
+          <p:cNvPr id="16" name="TextBox 15"/>
           <p:cNvSpPr txBox="1"/>
           <p:nvPr/>
         </p:nvSpPr>
@@ -15221,7 +15400,7 @@
       </p:sp>
       <p:sp>
         <p:nvSpPr>
-          <p:cNvPr id="18" name="Rounded Rectangle 17"/>
+          <p:cNvPr id="17" name="Rounded Rectangle 16"/>
           <p:cNvSpPr/>
           <p:nvPr/>
         </p:nvSpPr>
@@ -15267,7 +15446,7 @@
       </p:sp>
       <p:sp>
         <p:nvSpPr>
-          <p:cNvPr id="19" name="TextBox 18"/>
+          <p:cNvPr id="18" name="TextBox 17"/>
           <p:cNvSpPr txBox="1"/>
           <p:nvPr/>
         </p:nvSpPr>
@@ -15319,6 +15498,64 @@
                 <a:cs typeface="NanumGothic"/>
               </a:rPr>
               <a:t>수료를 축하합니다</a:t>
+            </a:r>
+          </a:p>
+        </p:txBody>
+      </p:sp>
+      <p:sp>
+        <p:nvSpPr>
+          <p:cNvPr id="19" name="TextBox 18"/>
+          <p:cNvSpPr txBox="1"/>
+          <p:nvPr/>
+        </p:nvSpPr>
+        <p:spPr>
+          <a:xfrm>
+            <a:off x="8988552" y="6419088"/>
+            <a:ext cx="2697480" cy="365760"/>
+          </a:xfrm>
+          <a:prstGeom prst="rect">
+            <a:avLst/>
+          </a:prstGeom>
+          <a:noFill/>
+        </p:spPr>
+        <p:txBody>
+          <a:bodyPr wrap="square" anchor="ctr" lIns="0" rIns="0" tIns="0" bIns="0">
+            <a:spAutoFit/>
+          </a:bodyPr>
+          <a:lstStyle/>
+          <a:p>
+            <a:pPr algn="r">
+              <a:lnSpc>
+                <a:spcPct val="100000"/>
+              </a:lnSpc>
+              <a:spcBef>
+                <a:spcPts val="0"/>
+              </a:spcBef>
+              <a:spcAft>
+                <a:spcPts val="600"/>
+              </a:spcAft>
+            </a:pPr>
+            <a:r>
+              <a:rPr sz="900" b="1">
+                <a:solidFill>
+                  <a:srgbClr val="F43F5E"/>
+                </a:solidFill>
+                <a:latin typeface="NanumGothic"/>
+                <a:ea typeface="NanumGothic"/>
+                <a:cs typeface="NanumGothic"/>
+              </a:rPr>
+              <a:t>Day 5 · 금</a:t>
+            </a:r>
+            <a:r>
+              <a:rPr sz="900" b="1">
+                <a:solidFill>
+                  <a:srgbClr val="64748B"/>
+                </a:solidFill>
+                <a:latin typeface="NanumGothic"/>
+                <a:ea typeface="NanumGothic"/>
+                <a:cs typeface="NanumGothic"/>
+              </a:rPr>
+              <a:t>   ·   20 / 21</a:t>
             </a:r>
           </a:p>
         </p:txBody>
@@ -15622,53 +15859,6 @@
         </p:nvSpPr>
         <p:spPr>
           <a:xfrm>
-            <a:off x="10241280" y="6419088"/>
-            <a:ext cx="1463040" cy="365760"/>
-          </a:xfrm>
-          <a:prstGeom prst="rect">
-            <a:avLst/>
-          </a:prstGeom>
-          <a:noFill/>
-        </p:spPr>
-        <p:txBody>
-          <a:bodyPr wrap="square" anchor="ctr" lIns="0" rIns="0" tIns="0" bIns="0">
-            <a:spAutoFit/>
-          </a:bodyPr>
-          <a:lstStyle/>
-          <a:p>
-            <a:pPr algn="r">
-              <a:lnSpc>
-                <a:spcPct val="100000"/>
-              </a:lnSpc>
-              <a:spcBef>
-                <a:spcPts val="0"/>
-              </a:spcBef>
-              <a:spcAft>
-                <a:spcPts val="600"/>
-              </a:spcAft>
-            </a:pPr>
-            <a:r>
-              <a:rPr sz="900" b="1">
-                <a:solidFill>
-                  <a:srgbClr val="F43F5E"/>
-                </a:solidFill>
-                <a:latin typeface="NanumGothic"/>
-                <a:ea typeface="NanumGothic"/>
-                <a:cs typeface="NanumGothic"/>
-              </a:rPr>
-              <a:t>Day 5 · 금</a:t>
-            </a:r>
-          </a:p>
-        </p:txBody>
-      </p:sp>
-      <p:sp>
-        <p:nvSpPr>
-          <p:cNvPr id="9" name="TextBox 8"/>
-          <p:cNvSpPr txBox="1"/>
-          <p:nvPr/>
-        </p:nvSpPr>
-        <p:spPr>
-          <a:xfrm>
             <a:off x="548640" y="1783080"/>
             <a:ext cx="6400800" cy="365760"/>
           </a:xfrm>
@@ -15710,7 +15900,7 @@
       </p:sp>
       <p:sp>
         <p:nvSpPr>
-          <p:cNvPr id="10" name="Oval 9"/>
+          <p:cNvPr id="9" name="Oval 8"/>
           <p:cNvSpPr/>
           <p:nvPr/>
         </p:nvSpPr>
@@ -15754,7 +15944,7 @@
       </p:sp>
       <p:sp>
         <p:nvSpPr>
-          <p:cNvPr id="11" name="TextBox 10"/>
+          <p:cNvPr id="10" name="TextBox 9"/>
           <p:cNvSpPr txBox="1"/>
           <p:nvPr/>
         </p:nvSpPr>
@@ -15801,7 +15991,7 @@
       </p:sp>
       <p:sp>
         <p:nvSpPr>
-          <p:cNvPr id="12" name="Oval 11"/>
+          <p:cNvPr id="11" name="Oval 10"/>
           <p:cNvSpPr/>
           <p:nvPr/>
         </p:nvSpPr>
@@ -15845,7 +16035,7 @@
       </p:sp>
       <p:sp>
         <p:nvSpPr>
-          <p:cNvPr id="13" name="TextBox 12"/>
+          <p:cNvPr id="12" name="TextBox 11"/>
           <p:cNvSpPr txBox="1"/>
           <p:nvPr/>
         </p:nvSpPr>
@@ -15892,7 +16082,7 @@
       </p:sp>
       <p:sp>
         <p:nvSpPr>
-          <p:cNvPr id="14" name="Oval 13"/>
+          <p:cNvPr id="13" name="Oval 12"/>
           <p:cNvSpPr/>
           <p:nvPr/>
         </p:nvSpPr>
@@ -15936,7 +16126,7 @@
       </p:sp>
       <p:sp>
         <p:nvSpPr>
-          <p:cNvPr id="15" name="TextBox 14"/>
+          <p:cNvPr id="14" name="TextBox 13"/>
           <p:cNvSpPr txBox="1"/>
           <p:nvPr/>
         </p:nvSpPr>
@@ -15983,7 +16173,7 @@
       </p:sp>
       <p:sp>
         <p:nvSpPr>
-          <p:cNvPr id="16" name="Rounded Rectangle 15"/>
+          <p:cNvPr id="15" name="Rounded Rectangle 14"/>
           <p:cNvSpPr/>
           <p:nvPr/>
         </p:nvSpPr>
@@ -16029,7 +16219,7 @@
       </p:sp>
       <p:sp>
         <p:nvSpPr>
-          <p:cNvPr id="17" name="TextBox 16"/>
+          <p:cNvPr id="16" name="TextBox 15"/>
           <p:cNvSpPr txBox="1"/>
           <p:nvPr/>
         </p:nvSpPr>
@@ -16076,7 +16266,7 @@
       </p:sp>
       <p:sp>
         <p:nvSpPr>
-          <p:cNvPr id="18" name="TextBox 17"/>
+          <p:cNvPr id="17" name="TextBox 16"/>
           <p:cNvSpPr txBox="1"/>
           <p:nvPr/>
         </p:nvSpPr>
@@ -16117,6 +16307,64 @@
                 <a:cs typeface="NanumGothic"/>
               </a:rPr>
               <a:t>수고하셨습니다. 이제 각자의 문제에 AI 에이전트를 적용할 차례입니다.</a:t>
+            </a:r>
+          </a:p>
+        </p:txBody>
+      </p:sp>
+      <p:sp>
+        <p:nvSpPr>
+          <p:cNvPr id="18" name="TextBox 17"/>
+          <p:cNvSpPr txBox="1"/>
+          <p:nvPr/>
+        </p:nvSpPr>
+        <p:spPr>
+          <a:xfrm>
+            <a:off x="8988552" y="6419088"/>
+            <a:ext cx="2697480" cy="365760"/>
+          </a:xfrm>
+          <a:prstGeom prst="rect">
+            <a:avLst/>
+          </a:prstGeom>
+          <a:noFill/>
+        </p:spPr>
+        <p:txBody>
+          <a:bodyPr wrap="square" anchor="ctr" lIns="0" rIns="0" tIns="0" bIns="0">
+            <a:spAutoFit/>
+          </a:bodyPr>
+          <a:lstStyle/>
+          <a:p>
+            <a:pPr algn="r">
+              <a:lnSpc>
+                <a:spcPct val="100000"/>
+              </a:lnSpc>
+              <a:spcBef>
+                <a:spcPts val="0"/>
+              </a:spcBef>
+              <a:spcAft>
+                <a:spcPts val="600"/>
+              </a:spcAft>
+            </a:pPr>
+            <a:r>
+              <a:rPr sz="900" b="1">
+                <a:solidFill>
+                  <a:srgbClr val="F43F5E"/>
+                </a:solidFill>
+                <a:latin typeface="NanumGothic"/>
+                <a:ea typeface="NanumGothic"/>
+                <a:cs typeface="NanumGothic"/>
+              </a:rPr>
+              <a:t>Day 5 · 금</a:t>
+            </a:r>
+            <a:r>
+              <a:rPr sz="900" b="1">
+                <a:solidFill>
+                  <a:srgbClr val="64748B"/>
+                </a:solidFill>
+                <a:latin typeface="NanumGothic"/>
+                <a:ea typeface="NanumGothic"/>
+                <a:cs typeface="NanumGothic"/>
+              </a:rPr>
+              <a:t>   ·   21 / 21</a:t>
             </a:r>
           </a:p>
         </p:txBody>
@@ -16414,54 +16662,7 @@
       </p:sp>
       <p:sp>
         <p:nvSpPr>
-          <p:cNvPr id="8" name="TextBox 7"/>
-          <p:cNvSpPr txBox="1"/>
-          <p:nvPr/>
-        </p:nvSpPr>
-        <p:spPr>
-          <a:xfrm>
-            <a:off x="10241280" y="6419088"/>
-            <a:ext cx="1463040" cy="365760"/>
-          </a:xfrm>
-          <a:prstGeom prst="rect">
-            <a:avLst/>
-          </a:prstGeom>
-          <a:noFill/>
-        </p:spPr>
-        <p:txBody>
-          <a:bodyPr wrap="square" anchor="ctr" lIns="0" rIns="0" tIns="0" bIns="0">
-            <a:spAutoFit/>
-          </a:bodyPr>
-          <a:lstStyle/>
-          <a:p>
-            <a:pPr algn="r">
-              <a:lnSpc>
-                <a:spcPct val="100000"/>
-              </a:lnSpc>
-              <a:spcBef>
-                <a:spcPts val="0"/>
-              </a:spcBef>
-              <a:spcAft>
-                <a:spcPts val="600"/>
-              </a:spcAft>
-            </a:pPr>
-            <a:r>
-              <a:rPr sz="900" b="1">
-                <a:solidFill>
-                  <a:srgbClr val="F43F5E"/>
-                </a:solidFill>
-                <a:latin typeface="NanumGothic"/>
-                <a:ea typeface="NanumGothic"/>
-                <a:cs typeface="NanumGothic"/>
-              </a:rPr>
-              <a:t>Day 5 · 금</a:t>
-            </a:r>
-          </a:p>
-        </p:txBody>
-      </p:sp>
-      <p:sp>
-        <p:nvSpPr>
-          <p:cNvPr id="9" name="Rounded Rectangle 8"/>
+          <p:cNvPr id="8" name="Rounded Rectangle 7"/>
           <p:cNvSpPr/>
           <p:nvPr/>
         </p:nvSpPr>
@@ -16507,7 +16708,7 @@
       </p:sp>
       <p:sp>
         <p:nvSpPr>
-          <p:cNvPr id="10" name="Rectangle 9"/>
+          <p:cNvPr id="9" name="Rectangle 8"/>
           <p:cNvSpPr/>
           <p:nvPr/>
         </p:nvSpPr>
@@ -16551,7 +16752,7 @@
       </p:sp>
       <p:sp>
         <p:nvSpPr>
-          <p:cNvPr id="11" name="Oval 10"/>
+          <p:cNvPr id="10" name="Oval 9"/>
           <p:cNvSpPr/>
           <p:nvPr/>
         </p:nvSpPr>
@@ -16595,7 +16796,7 @@
       </p:sp>
       <p:sp>
         <p:nvSpPr>
-          <p:cNvPr id="12" name="TextBox 11"/>
+          <p:cNvPr id="11" name="TextBox 10"/>
           <p:cNvSpPr txBox="1"/>
           <p:nvPr/>
         </p:nvSpPr>
@@ -16642,7 +16843,7 @@
       </p:sp>
       <p:sp>
         <p:nvSpPr>
-          <p:cNvPr id="13" name="TextBox 12"/>
+          <p:cNvPr id="12" name="TextBox 11"/>
           <p:cNvSpPr txBox="1"/>
           <p:nvPr/>
         </p:nvSpPr>
@@ -16689,7 +16890,7 @@
       </p:sp>
       <p:sp>
         <p:nvSpPr>
-          <p:cNvPr id="14" name="TextBox 13"/>
+          <p:cNvPr id="13" name="TextBox 12"/>
           <p:cNvSpPr txBox="1"/>
           <p:nvPr/>
         </p:nvSpPr>
@@ -16747,7 +16948,7 @@
       </p:sp>
       <p:sp>
         <p:nvSpPr>
-          <p:cNvPr id="15" name="TextBox 14"/>
+          <p:cNvPr id="14" name="TextBox 13"/>
           <p:cNvSpPr txBox="1"/>
           <p:nvPr/>
         </p:nvSpPr>
@@ -16794,7 +16995,7 @@
       </p:sp>
       <p:sp>
         <p:nvSpPr>
-          <p:cNvPr id="16" name="TextBox 15"/>
+          <p:cNvPr id="15" name="TextBox 14"/>
           <p:cNvSpPr txBox="1"/>
           <p:nvPr/>
         </p:nvSpPr>
@@ -16841,7 +17042,7 @@
       </p:sp>
       <p:sp>
         <p:nvSpPr>
-          <p:cNvPr id="17" name="Rounded Rectangle 16"/>
+          <p:cNvPr id="16" name="Rounded Rectangle 15"/>
           <p:cNvSpPr/>
           <p:nvPr/>
         </p:nvSpPr>
@@ -16887,7 +17088,7 @@
       </p:sp>
       <p:sp>
         <p:nvSpPr>
-          <p:cNvPr id="18" name="Rectangle 17"/>
+          <p:cNvPr id="17" name="Rectangle 16"/>
           <p:cNvSpPr/>
           <p:nvPr/>
         </p:nvSpPr>
@@ -16931,7 +17132,7 @@
       </p:sp>
       <p:sp>
         <p:nvSpPr>
-          <p:cNvPr id="19" name="Oval 18"/>
+          <p:cNvPr id="18" name="Oval 17"/>
           <p:cNvSpPr/>
           <p:nvPr/>
         </p:nvSpPr>
@@ -16975,7 +17176,7 @@
       </p:sp>
       <p:sp>
         <p:nvSpPr>
-          <p:cNvPr id="20" name="TextBox 19"/>
+          <p:cNvPr id="19" name="TextBox 18"/>
           <p:cNvSpPr txBox="1"/>
           <p:nvPr/>
         </p:nvSpPr>
@@ -17022,7 +17223,7 @@
       </p:sp>
       <p:sp>
         <p:nvSpPr>
-          <p:cNvPr id="21" name="TextBox 20"/>
+          <p:cNvPr id="20" name="TextBox 19"/>
           <p:cNvSpPr txBox="1"/>
           <p:nvPr/>
         </p:nvSpPr>
@@ -17069,7 +17270,7 @@
       </p:sp>
       <p:sp>
         <p:nvSpPr>
-          <p:cNvPr id="22" name="TextBox 21"/>
+          <p:cNvPr id="21" name="TextBox 20"/>
           <p:cNvSpPr txBox="1"/>
           <p:nvPr/>
         </p:nvSpPr>
@@ -17127,7 +17328,7 @@
       </p:sp>
       <p:sp>
         <p:nvSpPr>
-          <p:cNvPr id="23" name="TextBox 22"/>
+          <p:cNvPr id="22" name="TextBox 21"/>
           <p:cNvSpPr txBox="1"/>
           <p:nvPr/>
         </p:nvSpPr>
@@ -17174,7 +17375,7 @@
       </p:sp>
       <p:sp>
         <p:nvSpPr>
-          <p:cNvPr id="24" name="TextBox 23"/>
+          <p:cNvPr id="23" name="TextBox 22"/>
           <p:cNvSpPr txBox="1"/>
           <p:nvPr/>
         </p:nvSpPr>
@@ -17221,7 +17422,7 @@
       </p:sp>
       <p:sp>
         <p:nvSpPr>
-          <p:cNvPr id="25" name="Rounded Rectangle 24"/>
+          <p:cNvPr id="24" name="Rounded Rectangle 23"/>
           <p:cNvSpPr/>
           <p:nvPr/>
         </p:nvSpPr>
@@ -17267,7 +17468,7 @@
       </p:sp>
       <p:sp>
         <p:nvSpPr>
-          <p:cNvPr id="26" name="Rectangle 25"/>
+          <p:cNvPr id="25" name="Rectangle 24"/>
           <p:cNvSpPr/>
           <p:nvPr/>
         </p:nvSpPr>
@@ -17311,7 +17512,7 @@
       </p:sp>
       <p:sp>
         <p:nvSpPr>
-          <p:cNvPr id="27" name="Oval 26"/>
+          <p:cNvPr id="26" name="Oval 25"/>
           <p:cNvSpPr/>
           <p:nvPr/>
         </p:nvSpPr>
@@ -17355,7 +17556,7 @@
       </p:sp>
       <p:sp>
         <p:nvSpPr>
-          <p:cNvPr id="28" name="TextBox 27"/>
+          <p:cNvPr id="27" name="TextBox 26"/>
           <p:cNvSpPr txBox="1"/>
           <p:nvPr/>
         </p:nvSpPr>
@@ -17402,7 +17603,7 @@
       </p:sp>
       <p:sp>
         <p:nvSpPr>
-          <p:cNvPr id="29" name="TextBox 28"/>
+          <p:cNvPr id="28" name="TextBox 27"/>
           <p:cNvSpPr txBox="1"/>
           <p:nvPr/>
         </p:nvSpPr>
@@ -17449,7 +17650,7 @@
       </p:sp>
       <p:sp>
         <p:nvSpPr>
-          <p:cNvPr id="30" name="TextBox 29"/>
+          <p:cNvPr id="29" name="TextBox 28"/>
           <p:cNvSpPr txBox="1"/>
           <p:nvPr/>
         </p:nvSpPr>
@@ -17507,7 +17708,7 @@
       </p:sp>
       <p:sp>
         <p:nvSpPr>
-          <p:cNvPr id="31" name="TextBox 30"/>
+          <p:cNvPr id="30" name="TextBox 29"/>
           <p:cNvSpPr txBox="1"/>
           <p:nvPr/>
         </p:nvSpPr>
@@ -17554,7 +17755,7 @@
       </p:sp>
       <p:sp>
         <p:nvSpPr>
-          <p:cNvPr id="32" name="TextBox 31"/>
+          <p:cNvPr id="31" name="TextBox 30"/>
           <p:cNvSpPr txBox="1"/>
           <p:nvPr/>
         </p:nvSpPr>
@@ -17595,6 +17796,64 @@
                 <a:cs typeface="NanumGothic"/>
               </a:rPr>
               <a:t>90분</a:t>
+            </a:r>
+          </a:p>
+        </p:txBody>
+      </p:sp>
+      <p:sp>
+        <p:nvSpPr>
+          <p:cNvPr id="32" name="TextBox 31"/>
+          <p:cNvSpPr txBox="1"/>
+          <p:nvPr/>
+        </p:nvSpPr>
+        <p:spPr>
+          <a:xfrm>
+            <a:off x="8988552" y="6419088"/>
+            <a:ext cx="2697480" cy="365760"/>
+          </a:xfrm>
+          <a:prstGeom prst="rect">
+            <a:avLst/>
+          </a:prstGeom>
+          <a:noFill/>
+        </p:spPr>
+        <p:txBody>
+          <a:bodyPr wrap="square" anchor="ctr" lIns="0" rIns="0" tIns="0" bIns="0">
+            <a:spAutoFit/>
+          </a:bodyPr>
+          <a:lstStyle/>
+          <a:p>
+            <a:pPr algn="r">
+              <a:lnSpc>
+                <a:spcPct val="100000"/>
+              </a:lnSpc>
+              <a:spcBef>
+                <a:spcPts val="0"/>
+              </a:spcBef>
+              <a:spcAft>
+                <a:spcPts val="600"/>
+              </a:spcAft>
+            </a:pPr>
+            <a:r>
+              <a:rPr sz="900" b="1">
+                <a:solidFill>
+                  <a:srgbClr val="F43F5E"/>
+                </a:solidFill>
+                <a:latin typeface="NanumGothic"/>
+                <a:ea typeface="NanumGothic"/>
+                <a:cs typeface="NanumGothic"/>
+              </a:rPr>
+              <a:t>Day 5 · 금</a:t>
+            </a:r>
+            <a:r>
+              <a:rPr sz="900" b="1">
+                <a:solidFill>
+                  <a:srgbClr val="64748B"/>
+                </a:solidFill>
+                <a:latin typeface="NanumGothic"/>
+                <a:ea typeface="NanumGothic"/>
+                <a:cs typeface="NanumGothic"/>
+              </a:rPr>
+              <a:t>   ·   3 / 21</a:t>
             </a:r>
           </a:p>
         </p:txBody>
@@ -17901,6 +18160,64 @@
           </a:p>
         </p:txBody>
       </p:sp>
+      <p:sp>
+        <p:nvSpPr>
+          <p:cNvPr id="8" name="TextBox 7"/>
+          <p:cNvSpPr txBox="1"/>
+          <p:nvPr/>
+        </p:nvSpPr>
+        <p:spPr>
+          <a:xfrm>
+            <a:off x="8988552" y="6419088"/>
+            <a:ext cx="2697480" cy="365760"/>
+          </a:xfrm>
+          <a:prstGeom prst="rect">
+            <a:avLst/>
+          </a:prstGeom>
+          <a:noFill/>
+        </p:spPr>
+        <p:txBody>
+          <a:bodyPr wrap="square" anchor="ctr" lIns="0" rIns="0" tIns="0" bIns="0">
+            <a:spAutoFit/>
+          </a:bodyPr>
+          <a:lstStyle/>
+          <a:p>
+            <a:pPr algn="r">
+              <a:lnSpc>
+                <a:spcPct val="100000"/>
+              </a:lnSpc>
+              <a:spcBef>
+                <a:spcPts val="0"/>
+              </a:spcBef>
+              <a:spcAft>
+                <a:spcPts val="600"/>
+              </a:spcAft>
+            </a:pPr>
+            <a:r>
+              <a:rPr sz="900" b="1">
+                <a:solidFill>
+                  <a:srgbClr val="F43F5E"/>
+                </a:solidFill>
+                <a:latin typeface="NanumGothic"/>
+                <a:ea typeface="NanumGothic"/>
+                <a:cs typeface="NanumGothic"/>
+              </a:rPr>
+              <a:t>Day 5 · 금</a:t>
+            </a:r>
+            <a:r>
+              <a:rPr sz="900" b="1">
+                <a:solidFill>
+                  <a:srgbClr val="CBD5E1"/>
+                </a:solidFill>
+                <a:latin typeface="NanumGothic"/>
+                <a:ea typeface="NanumGothic"/>
+                <a:cs typeface="NanumGothic"/>
+              </a:rPr>
+              <a:t>   ·   4 / 21</a:t>
+            </a:r>
+          </a:p>
+        </p:txBody>
+      </p:sp>
     </p:spTree>
   </p:cSld>
   <p:clrMapOvr>
@@ -18194,54 +18511,7 @@
       </p:sp>
       <p:sp>
         <p:nvSpPr>
-          <p:cNvPr id="8" name="TextBox 7"/>
-          <p:cNvSpPr txBox="1"/>
-          <p:nvPr/>
-        </p:nvSpPr>
-        <p:spPr>
-          <a:xfrm>
-            <a:off x="10241280" y="6419088"/>
-            <a:ext cx="1463040" cy="365760"/>
-          </a:xfrm>
-          <a:prstGeom prst="rect">
-            <a:avLst/>
-          </a:prstGeom>
-          <a:noFill/>
-        </p:spPr>
-        <p:txBody>
-          <a:bodyPr wrap="square" anchor="ctr" lIns="0" rIns="0" tIns="0" bIns="0">
-            <a:spAutoFit/>
-          </a:bodyPr>
-          <a:lstStyle/>
-          <a:p>
-            <a:pPr algn="r">
-              <a:lnSpc>
-                <a:spcPct val="100000"/>
-              </a:lnSpc>
-              <a:spcBef>
-                <a:spcPts val="0"/>
-              </a:spcBef>
-              <a:spcAft>
-                <a:spcPts val="600"/>
-              </a:spcAft>
-            </a:pPr>
-            <a:r>
-              <a:rPr sz="900" b="1">
-                <a:solidFill>
-                  <a:srgbClr val="F43F5E"/>
-                </a:solidFill>
-                <a:latin typeface="NanumGothic"/>
-                <a:ea typeface="NanumGothic"/>
-                <a:cs typeface="NanumGothic"/>
-              </a:rPr>
-              <a:t>Day 5 · 금</a:t>
-            </a:r>
-          </a:p>
-        </p:txBody>
-      </p:sp>
-      <p:sp>
-        <p:nvSpPr>
-          <p:cNvPr id="9" name="Rounded Rectangle 8"/>
+          <p:cNvPr id="8" name="Rounded Rectangle 7"/>
           <p:cNvSpPr/>
           <p:nvPr/>
         </p:nvSpPr>
@@ -18287,7 +18557,7 @@
       </p:sp>
       <p:sp>
         <p:nvSpPr>
-          <p:cNvPr id="10" name="TextBox 9"/>
+          <p:cNvPr id="9" name="TextBox 8"/>
           <p:cNvSpPr txBox="1"/>
           <p:nvPr/>
         </p:nvSpPr>
@@ -18334,7 +18604,7 @@
       </p:sp>
       <p:sp>
         <p:nvSpPr>
-          <p:cNvPr id="11" name="TextBox 10"/>
+          <p:cNvPr id="10" name="TextBox 9"/>
           <p:cNvSpPr txBox="1"/>
           <p:nvPr/>
         </p:nvSpPr>
@@ -18381,7 +18651,7 @@
       </p:sp>
       <p:sp>
         <p:nvSpPr>
-          <p:cNvPr id="12" name="Rounded Rectangle 11"/>
+          <p:cNvPr id="11" name="Rounded Rectangle 10"/>
           <p:cNvSpPr/>
           <p:nvPr/>
         </p:nvSpPr>
@@ -18427,7 +18697,7 @@
       </p:sp>
       <p:sp>
         <p:nvSpPr>
-          <p:cNvPr id="13" name="Oval 12"/>
+          <p:cNvPr id="12" name="Oval 11"/>
           <p:cNvSpPr/>
           <p:nvPr/>
         </p:nvSpPr>
@@ -18471,7 +18741,7 @@
       </p:sp>
       <p:sp>
         <p:nvSpPr>
-          <p:cNvPr id="14" name="TextBox 13"/>
+          <p:cNvPr id="13" name="TextBox 12"/>
           <p:cNvSpPr txBox="1"/>
           <p:nvPr/>
         </p:nvSpPr>
@@ -18518,7 +18788,7 @@
       </p:sp>
       <p:sp>
         <p:nvSpPr>
-          <p:cNvPr id="15" name="TextBox 14"/>
+          <p:cNvPr id="14" name="TextBox 13"/>
           <p:cNvSpPr txBox="1"/>
           <p:nvPr/>
         </p:nvSpPr>
@@ -18565,7 +18835,7 @@
       </p:sp>
       <p:sp>
         <p:nvSpPr>
-          <p:cNvPr id="16" name="Rounded Rectangle 15"/>
+          <p:cNvPr id="15" name="Rounded Rectangle 14"/>
           <p:cNvSpPr/>
           <p:nvPr/>
         </p:nvSpPr>
@@ -18611,7 +18881,7 @@
       </p:sp>
       <p:sp>
         <p:nvSpPr>
-          <p:cNvPr id="17" name="Oval 16"/>
+          <p:cNvPr id="16" name="Oval 15"/>
           <p:cNvSpPr/>
           <p:nvPr/>
         </p:nvSpPr>
@@ -18655,7 +18925,7 @@
       </p:sp>
       <p:sp>
         <p:nvSpPr>
-          <p:cNvPr id="18" name="TextBox 17"/>
+          <p:cNvPr id="17" name="TextBox 16"/>
           <p:cNvSpPr txBox="1"/>
           <p:nvPr/>
         </p:nvSpPr>
@@ -18702,7 +18972,7 @@
       </p:sp>
       <p:sp>
         <p:nvSpPr>
-          <p:cNvPr id="19" name="TextBox 18"/>
+          <p:cNvPr id="18" name="TextBox 17"/>
           <p:cNvSpPr txBox="1"/>
           <p:nvPr/>
         </p:nvSpPr>
@@ -18749,7 +19019,7 @@
       </p:sp>
       <p:sp>
         <p:nvSpPr>
-          <p:cNvPr id="20" name="Rounded Rectangle 19"/>
+          <p:cNvPr id="19" name="Rounded Rectangle 18"/>
           <p:cNvSpPr/>
           <p:nvPr/>
         </p:nvSpPr>
@@ -18795,7 +19065,7 @@
       </p:sp>
       <p:sp>
         <p:nvSpPr>
-          <p:cNvPr id="21" name="Oval 20"/>
+          <p:cNvPr id="20" name="Oval 19"/>
           <p:cNvSpPr/>
           <p:nvPr/>
         </p:nvSpPr>
@@ -18839,7 +19109,7 @@
       </p:sp>
       <p:sp>
         <p:nvSpPr>
-          <p:cNvPr id="22" name="TextBox 21"/>
+          <p:cNvPr id="21" name="TextBox 20"/>
           <p:cNvSpPr txBox="1"/>
           <p:nvPr/>
         </p:nvSpPr>
@@ -18886,7 +19156,7 @@
       </p:sp>
       <p:sp>
         <p:nvSpPr>
-          <p:cNvPr id="23" name="TextBox 22"/>
+          <p:cNvPr id="22" name="TextBox 21"/>
           <p:cNvSpPr txBox="1"/>
           <p:nvPr/>
         </p:nvSpPr>
@@ -18927,6 +19197,64 @@
                 <a:cs typeface="NanumGothic"/>
               </a:rPr>
               <a:t>발표 준비</a:t>
+            </a:r>
+          </a:p>
+        </p:txBody>
+      </p:sp>
+      <p:sp>
+        <p:nvSpPr>
+          <p:cNvPr id="23" name="TextBox 22"/>
+          <p:cNvSpPr txBox="1"/>
+          <p:nvPr/>
+        </p:nvSpPr>
+        <p:spPr>
+          <a:xfrm>
+            <a:off x="8988552" y="6419088"/>
+            <a:ext cx="2697480" cy="365760"/>
+          </a:xfrm>
+          <a:prstGeom prst="rect">
+            <a:avLst/>
+          </a:prstGeom>
+          <a:noFill/>
+        </p:spPr>
+        <p:txBody>
+          <a:bodyPr wrap="square" anchor="ctr" lIns="0" rIns="0" tIns="0" bIns="0">
+            <a:spAutoFit/>
+          </a:bodyPr>
+          <a:lstStyle/>
+          <a:p>
+            <a:pPr algn="r">
+              <a:lnSpc>
+                <a:spcPct val="100000"/>
+              </a:lnSpc>
+              <a:spcBef>
+                <a:spcPts val="0"/>
+              </a:spcBef>
+              <a:spcAft>
+                <a:spcPts val="600"/>
+              </a:spcAft>
+            </a:pPr>
+            <a:r>
+              <a:rPr sz="900" b="1">
+                <a:solidFill>
+                  <a:srgbClr val="F43F5E"/>
+                </a:solidFill>
+                <a:latin typeface="NanumGothic"/>
+                <a:ea typeface="NanumGothic"/>
+                <a:cs typeface="NanumGothic"/>
+              </a:rPr>
+              <a:t>Day 5 · 금</a:t>
+            </a:r>
+            <a:r>
+              <a:rPr sz="900" b="1">
+                <a:solidFill>
+                  <a:srgbClr val="64748B"/>
+                </a:solidFill>
+                <a:latin typeface="NanumGothic"/>
+                <a:ea typeface="NanumGothic"/>
+                <a:cs typeface="NanumGothic"/>
+              </a:rPr>
+              <a:t>   ·   5 / 21</a:t>
             </a:r>
           </a:p>
         </p:txBody>
@@ -19224,54 +19552,7 @@
       </p:sp>
       <p:sp>
         <p:nvSpPr>
-          <p:cNvPr id="8" name="TextBox 7"/>
-          <p:cNvSpPr txBox="1"/>
-          <p:nvPr/>
-        </p:nvSpPr>
-        <p:spPr>
-          <a:xfrm>
-            <a:off x="10241280" y="6419088"/>
-            <a:ext cx="1463040" cy="365760"/>
-          </a:xfrm>
-          <a:prstGeom prst="rect">
-            <a:avLst/>
-          </a:prstGeom>
-          <a:noFill/>
-        </p:spPr>
-        <p:txBody>
-          <a:bodyPr wrap="square" anchor="ctr" lIns="0" rIns="0" tIns="0" bIns="0">
-            <a:spAutoFit/>
-          </a:bodyPr>
-          <a:lstStyle/>
-          <a:p>
-            <a:pPr algn="r">
-              <a:lnSpc>
-                <a:spcPct val="100000"/>
-              </a:lnSpc>
-              <a:spcBef>
-                <a:spcPts val="0"/>
-              </a:spcBef>
-              <a:spcAft>
-                <a:spcPts val="600"/>
-              </a:spcAft>
-            </a:pPr>
-            <a:r>
-              <a:rPr sz="900" b="1">
-                <a:solidFill>
-                  <a:srgbClr val="F43F5E"/>
-                </a:solidFill>
-                <a:latin typeface="NanumGothic"/>
-                <a:ea typeface="NanumGothic"/>
-                <a:cs typeface="NanumGothic"/>
-              </a:rPr>
-              <a:t>Day 5 · 금</a:t>
-            </a:r>
-          </a:p>
-        </p:txBody>
-      </p:sp>
-      <p:sp>
-        <p:nvSpPr>
-          <p:cNvPr id="9" name="Oval 8"/>
+          <p:cNvPr id="8" name="Oval 7"/>
           <p:cNvSpPr/>
           <p:nvPr/>
         </p:nvSpPr>
@@ -19315,7 +19596,7 @@
       </p:sp>
       <p:sp>
         <p:nvSpPr>
-          <p:cNvPr id="10" name="TextBox 9"/>
+          <p:cNvPr id="9" name="TextBox 8"/>
           <p:cNvSpPr txBox="1"/>
           <p:nvPr/>
         </p:nvSpPr>
@@ -19362,7 +19643,7 @@
       </p:sp>
       <p:sp>
         <p:nvSpPr>
-          <p:cNvPr id="11" name="TextBox 10"/>
+          <p:cNvPr id="10" name="TextBox 9"/>
           <p:cNvSpPr txBox="1"/>
           <p:nvPr/>
         </p:nvSpPr>
@@ -19409,7 +19690,7 @@
       </p:sp>
       <p:sp>
         <p:nvSpPr>
-          <p:cNvPr id="12" name="Oval 11"/>
+          <p:cNvPr id="11" name="Oval 10"/>
           <p:cNvSpPr/>
           <p:nvPr/>
         </p:nvSpPr>
@@ -19453,7 +19734,7 @@
       </p:sp>
       <p:sp>
         <p:nvSpPr>
-          <p:cNvPr id="13" name="TextBox 12"/>
+          <p:cNvPr id="12" name="TextBox 11"/>
           <p:cNvSpPr txBox="1"/>
           <p:nvPr/>
         </p:nvSpPr>
@@ -19500,7 +19781,7 @@
       </p:sp>
       <p:sp>
         <p:nvSpPr>
-          <p:cNvPr id="14" name="TextBox 13"/>
+          <p:cNvPr id="13" name="TextBox 12"/>
           <p:cNvSpPr txBox="1"/>
           <p:nvPr/>
         </p:nvSpPr>
@@ -19547,7 +19828,7 @@
       </p:sp>
       <p:sp>
         <p:nvSpPr>
-          <p:cNvPr id="15" name="Oval 14"/>
+          <p:cNvPr id="14" name="Oval 13"/>
           <p:cNvSpPr/>
           <p:nvPr/>
         </p:nvSpPr>
@@ -19591,7 +19872,7 @@
       </p:sp>
       <p:sp>
         <p:nvSpPr>
-          <p:cNvPr id="16" name="TextBox 15"/>
+          <p:cNvPr id="15" name="TextBox 14"/>
           <p:cNvSpPr txBox="1"/>
           <p:nvPr/>
         </p:nvSpPr>
@@ -19638,7 +19919,7 @@
       </p:sp>
       <p:sp>
         <p:nvSpPr>
-          <p:cNvPr id="17" name="TextBox 16"/>
+          <p:cNvPr id="16" name="TextBox 15"/>
           <p:cNvSpPr txBox="1"/>
           <p:nvPr/>
         </p:nvSpPr>
@@ -19685,7 +19966,7 @@
       </p:sp>
       <p:sp>
         <p:nvSpPr>
-          <p:cNvPr id="18" name="Rounded Rectangle 17"/>
+          <p:cNvPr id="17" name="Rounded Rectangle 16"/>
           <p:cNvSpPr/>
           <p:nvPr/>
         </p:nvSpPr>
@@ -19731,7 +20012,7 @@
       </p:sp>
       <p:sp>
         <p:nvSpPr>
-          <p:cNvPr id="19" name="TextBox 18"/>
+          <p:cNvPr id="18" name="TextBox 17"/>
           <p:cNvSpPr txBox="1"/>
           <p:nvPr/>
         </p:nvSpPr>
@@ -19783,6 +20064,64 @@
                 <a:cs typeface="NanumGothic"/>
               </a:rPr>
               <a:t>버퍼는 팀별 진척에 맞게 유연하게</a:t>
+            </a:r>
+          </a:p>
+        </p:txBody>
+      </p:sp>
+      <p:sp>
+        <p:nvSpPr>
+          <p:cNvPr id="19" name="TextBox 18"/>
+          <p:cNvSpPr txBox="1"/>
+          <p:nvPr/>
+        </p:nvSpPr>
+        <p:spPr>
+          <a:xfrm>
+            <a:off x="8988552" y="6419088"/>
+            <a:ext cx="2697480" cy="365760"/>
+          </a:xfrm>
+          <a:prstGeom prst="rect">
+            <a:avLst/>
+          </a:prstGeom>
+          <a:noFill/>
+        </p:spPr>
+        <p:txBody>
+          <a:bodyPr wrap="square" anchor="ctr" lIns="0" rIns="0" tIns="0" bIns="0">
+            <a:spAutoFit/>
+          </a:bodyPr>
+          <a:lstStyle/>
+          <a:p>
+            <a:pPr algn="r">
+              <a:lnSpc>
+                <a:spcPct val="100000"/>
+              </a:lnSpc>
+              <a:spcBef>
+                <a:spcPts val="0"/>
+              </a:spcBef>
+              <a:spcAft>
+                <a:spcPts val="600"/>
+              </a:spcAft>
+            </a:pPr>
+            <a:r>
+              <a:rPr sz="900" b="1">
+                <a:solidFill>
+                  <a:srgbClr val="F43F5E"/>
+                </a:solidFill>
+                <a:latin typeface="NanumGothic"/>
+                <a:ea typeface="NanumGothic"/>
+                <a:cs typeface="NanumGothic"/>
+              </a:rPr>
+              <a:t>Day 5 · 금</a:t>
+            </a:r>
+            <a:r>
+              <a:rPr sz="900" b="1">
+                <a:solidFill>
+                  <a:srgbClr val="64748B"/>
+                </a:solidFill>
+                <a:latin typeface="NanumGothic"/>
+                <a:ea typeface="NanumGothic"/>
+                <a:cs typeface="NanumGothic"/>
+              </a:rPr>
+              <a:t>   ·   6 / 21</a:t>
             </a:r>
           </a:p>
         </p:txBody>
@@ -20080,54 +20419,7 @@
       </p:sp>
       <p:sp>
         <p:nvSpPr>
-          <p:cNvPr id="8" name="TextBox 7"/>
-          <p:cNvSpPr txBox="1"/>
-          <p:nvPr/>
-        </p:nvSpPr>
-        <p:spPr>
-          <a:xfrm>
-            <a:off x="10241280" y="6419088"/>
-            <a:ext cx="1463040" cy="365760"/>
-          </a:xfrm>
-          <a:prstGeom prst="rect">
-            <a:avLst/>
-          </a:prstGeom>
-          <a:noFill/>
-        </p:spPr>
-        <p:txBody>
-          <a:bodyPr wrap="square" anchor="ctr" lIns="0" rIns="0" tIns="0" bIns="0">
-            <a:spAutoFit/>
-          </a:bodyPr>
-          <a:lstStyle/>
-          <a:p>
-            <a:pPr algn="r">
-              <a:lnSpc>
-                <a:spcPct val="100000"/>
-              </a:lnSpc>
-              <a:spcBef>
-                <a:spcPts val="0"/>
-              </a:spcBef>
-              <a:spcAft>
-                <a:spcPts val="600"/>
-              </a:spcAft>
-            </a:pPr>
-            <a:r>
-              <a:rPr sz="900" b="1">
-                <a:solidFill>
-                  <a:srgbClr val="F43F5E"/>
-                </a:solidFill>
-                <a:latin typeface="NanumGothic"/>
-                <a:ea typeface="NanumGothic"/>
-                <a:cs typeface="NanumGothic"/>
-              </a:rPr>
-              <a:t>Day 5 · 금</a:t>
-            </a:r>
-          </a:p>
-        </p:txBody>
-      </p:sp>
-      <p:sp>
-        <p:nvSpPr>
-          <p:cNvPr id="9" name="Rounded Rectangle 8"/>
+          <p:cNvPr id="8" name="Rounded Rectangle 7"/>
           <p:cNvSpPr/>
           <p:nvPr/>
         </p:nvSpPr>
@@ -20173,7 +20465,7 @@
       </p:sp>
       <p:sp>
         <p:nvSpPr>
-          <p:cNvPr id="10" name="TextBox 9"/>
+          <p:cNvPr id="9" name="TextBox 8"/>
           <p:cNvSpPr txBox="1"/>
           <p:nvPr/>
         </p:nvSpPr>
@@ -20220,7 +20512,7 @@
       </p:sp>
       <p:sp>
         <p:nvSpPr>
-          <p:cNvPr id="11" name="Oval 10"/>
+          <p:cNvPr id="10" name="Oval 9"/>
           <p:cNvSpPr/>
           <p:nvPr/>
         </p:nvSpPr>
@@ -20264,7 +20556,7 @@
       </p:sp>
       <p:sp>
         <p:nvSpPr>
-          <p:cNvPr id="12" name="TextBox 11"/>
+          <p:cNvPr id="11" name="TextBox 10"/>
           <p:cNvSpPr txBox="1"/>
           <p:nvPr/>
         </p:nvSpPr>
@@ -20311,7 +20603,7 @@
       </p:sp>
       <p:sp>
         <p:nvSpPr>
-          <p:cNvPr id="13" name="TextBox 12"/>
+          <p:cNvPr id="12" name="TextBox 11"/>
           <p:cNvSpPr txBox="1"/>
           <p:nvPr/>
         </p:nvSpPr>
@@ -20358,7 +20650,7 @@
       </p:sp>
       <p:sp>
         <p:nvSpPr>
-          <p:cNvPr id="14" name="Oval 13"/>
+          <p:cNvPr id="13" name="Oval 12"/>
           <p:cNvSpPr/>
           <p:nvPr/>
         </p:nvSpPr>
@@ -20402,7 +20694,7 @@
       </p:sp>
       <p:sp>
         <p:nvSpPr>
-          <p:cNvPr id="15" name="TextBox 14"/>
+          <p:cNvPr id="14" name="TextBox 13"/>
           <p:cNvSpPr txBox="1"/>
           <p:nvPr/>
         </p:nvSpPr>
@@ -20449,7 +20741,7 @@
       </p:sp>
       <p:sp>
         <p:nvSpPr>
-          <p:cNvPr id="16" name="TextBox 15"/>
+          <p:cNvPr id="15" name="TextBox 14"/>
           <p:cNvSpPr txBox="1"/>
           <p:nvPr/>
         </p:nvSpPr>
@@ -20496,7 +20788,7 @@
       </p:sp>
       <p:sp>
         <p:nvSpPr>
-          <p:cNvPr id="17" name="Oval 16"/>
+          <p:cNvPr id="16" name="Oval 15"/>
           <p:cNvSpPr/>
           <p:nvPr/>
         </p:nvSpPr>
@@ -20540,7 +20832,7 @@
       </p:sp>
       <p:sp>
         <p:nvSpPr>
-          <p:cNvPr id="18" name="TextBox 17"/>
+          <p:cNvPr id="17" name="TextBox 16"/>
           <p:cNvSpPr txBox="1"/>
           <p:nvPr/>
         </p:nvSpPr>
@@ -20587,7 +20879,7 @@
       </p:sp>
       <p:sp>
         <p:nvSpPr>
-          <p:cNvPr id="19" name="TextBox 18"/>
+          <p:cNvPr id="18" name="TextBox 17"/>
           <p:cNvSpPr txBox="1"/>
           <p:nvPr/>
         </p:nvSpPr>
@@ -20634,7 +20926,7 @@
       </p:sp>
       <p:sp>
         <p:nvSpPr>
-          <p:cNvPr id="20" name="Oval 19"/>
+          <p:cNvPr id="19" name="Oval 18"/>
           <p:cNvSpPr/>
           <p:nvPr/>
         </p:nvSpPr>
@@ -20678,7 +20970,7 @@
       </p:sp>
       <p:sp>
         <p:nvSpPr>
-          <p:cNvPr id="21" name="TextBox 20"/>
+          <p:cNvPr id="20" name="TextBox 19"/>
           <p:cNvSpPr txBox="1"/>
           <p:nvPr/>
         </p:nvSpPr>
@@ -20725,7 +21017,7 @@
       </p:sp>
       <p:sp>
         <p:nvSpPr>
-          <p:cNvPr id="22" name="TextBox 21"/>
+          <p:cNvPr id="21" name="TextBox 20"/>
           <p:cNvSpPr txBox="1"/>
           <p:nvPr/>
         </p:nvSpPr>
@@ -20772,7 +21064,7 @@
       </p:sp>
       <p:sp>
         <p:nvSpPr>
-          <p:cNvPr id="23" name="Rounded Rectangle 22"/>
+          <p:cNvPr id="22" name="Rounded Rectangle 21"/>
           <p:cNvSpPr/>
           <p:nvPr/>
         </p:nvSpPr>
@@ -20816,7 +21108,7 @@
       </p:sp>
       <p:sp>
         <p:nvSpPr>
-          <p:cNvPr id="24" name="TextBox 23"/>
+          <p:cNvPr id="23" name="TextBox 22"/>
           <p:cNvSpPr txBox="1"/>
           <p:nvPr/>
         </p:nvSpPr>
@@ -20863,7 +21155,7 @@
       </p:sp>
       <p:sp>
         <p:nvSpPr>
-          <p:cNvPr id="25" name="TextBox 24"/>
+          <p:cNvPr id="24" name="TextBox 23"/>
           <p:cNvSpPr txBox="1"/>
           <p:nvPr/>
         </p:nvSpPr>
@@ -20904,6 +21196,64 @@
                 <a:cs typeface="NanumGothic"/>
               </a:rPr>
               <a:t>발표 가능한 최종 가설 제안 + 분석 노트</a:t>
+            </a:r>
+          </a:p>
+        </p:txBody>
+      </p:sp>
+      <p:sp>
+        <p:nvSpPr>
+          <p:cNvPr id="25" name="TextBox 24"/>
+          <p:cNvSpPr txBox="1"/>
+          <p:nvPr/>
+        </p:nvSpPr>
+        <p:spPr>
+          <a:xfrm>
+            <a:off x="8988552" y="6419088"/>
+            <a:ext cx="2697480" cy="365760"/>
+          </a:xfrm>
+          <a:prstGeom prst="rect">
+            <a:avLst/>
+          </a:prstGeom>
+          <a:noFill/>
+        </p:spPr>
+        <p:txBody>
+          <a:bodyPr wrap="square" anchor="ctr" lIns="0" rIns="0" tIns="0" bIns="0">
+            <a:spAutoFit/>
+          </a:bodyPr>
+          <a:lstStyle/>
+          <a:p>
+            <a:pPr algn="r">
+              <a:lnSpc>
+                <a:spcPct val="100000"/>
+              </a:lnSpc>
+              <a:spcBef>
+                <a:spcPts val="0"/>
+              </a:spcBef>
+              <a:spcAft>
+                <a:spcPts val="600"/>
+              </a:spcAft>
+            </a:pPr>
+            <a:r>
+              <a:rPr sz="900" b="1">
+                <a:solidFill>
+                  <a:srgbClr val="F43F5E"/>
+                </a:solidFill>
+                <a:latin typeface="NanumGothic"/>
+                <a:ea typeface="NanumGothic"/>
+                <a:cs typeface="NanumGothic"/>
+              </a:rPr>
+              <a:t>Day 5 · 금</a:t>
+            </a:r>
+            <a:r>
+              <a:rPr sz="900" b="1">
+                <a:solidFill>
+                  <a:srgbClr val="64748B"/>
+                </a:solidFill>
+                <a:latin typeface="NanumGothic"/>
+                <a:ea typeface="NanumGothic"/>
+                <a:cs typeface="NanumGothic"/>
+              </a:rPr>
+              <a:t>   ·   7 / 21</a:t>
             </a:r>
           </a:p>
         </p:txBody>
@@ -21201,54 +21551,7 @@
       </p:sp>
       <p:sp>
         <p:nvSpPr>
-          <p:cNvPr id="8" name="TextBox 7"/>
-          <p:cNvSpPr txBox="1"/>
-          <p:nvPr/>
-        </p:nvSpPr>
-        <p:spPr>
-          <a:xfrm>
-            <a:off x="10241280" y="6419088"/>
-            <a:ext cx="1463040" cy="365760"/>
-          </a:xfrm>
-          <a:prstGeom prst="rect">
-            <a:avLst/>
-          </a:prstGeom>
-          <a:noFill/>
-        </p:spPr>
-        <p:txBody>
-          <a:bodyPr wrap="square" anchor="ctr" lIns="0" rIns="0" tIns="0" bIns="0">
-            <a:spAutoFit/>
-          </a:bodyPr>
-          <a:lstStyle/>
-          <a:p>
-            <a:pPr algn="r">
-              <a:lnSpc>
-                <a:spcPct val="100000"/>
-              </a:lnSpc>
-              <a:spcBef>
-                <a:spcPts val="0"/>
-              </a:spcBef>
-              <a:spcAft>
-                <a:spcPts val="600"/>
-              </a:spcAft>
-            </a:pPr>
-            <a:r>
-              <a:rPr sz="900" b="1">
-                <a:solidFill>
-                  <a:srgbClr val="F43F5E"/>
-                </a:solidFill>
-                <a:latin typeface="NanumGothic"/>
-                <a:ea typeface="NanumGothic"/>
-                <a:cs typeface="NanumGothic"/>
-              </a:rPr>
-              <a:t>Day 5 · 금</a:t>
-            </a:r>
-          </a:p>
-        </p:txBody>
-      </p:sp>
-      <p:sp>
-        <p:nvSpPr>
-          <p:cNvPr id="9" name="Oval 8"/>
+          <p:cNvPr id="8" name="Oval 7"/>
           <p:cNvSpPr/>
           <p:nvPr/>
         </p:nvSpPr>
@@ -21292,7 +21595,7 @@
       </p:sp>
       <p:sp>
         <p:nvSpPr>
-          <p:cNvPr id="10" name="TextBox 9"/>
+          <p:cNvPr id="9" name="TextBox 8"/>
           <p:cNvSpPr txBox="1"/>
           <p:nvPr/>
         </p:nvSpPr>
@@ -21339,7 +21642,7 @@
       </p:sp>
       <p:sp>
         <p:nvSpPr>
-          <p:cNvPr id="11" name="TextBox 10"/>
+          <p:cNvPr id="10" name="TextBox 9"/>
           <p:cNvSpPr txBox="1"/>
           <p:nvPr/>
         </p:nvSpPr>
@@ -21386,7 +21689,7 @@
       </p:sp>
       <p:sp>
         <p:nvSpPr>
-          <p:cNvPr id="12" name="Oval 11"/>
+          <p:cNvPr id="11" name="Oval 10"/>
           <p:cNvSpPr/>
           <p:nvPr/>
         </p:nvSpPr>
@@ -21430,7 +21733,7 @@
       </p:sp>
       <p:sp>
         <p:nvSpPr>
-          <p:cNvPr id="13" name="TextBox 12"/>
+          <p:cNvPr id="12" name="TextBox 11"/>
           <p:cNvSpPr txBox="1"/>
           <p:nvPr/>
         </p:nvSpPr>
@@ -21477,7 +21780,7 @@
       </p:sp>
       <p:sp>
         <p:nvSpPr>
-          <p:cNvPr id="14" name="TextBox 13"/>
+          <p:cNvPr id="13" name="TextBox 12"/>
           <p:cNvSpPr txBox="1"/>
           <p:nvPr/>
         </p:nvSpPr>
@@ -21524,7 +21827,7 @@
       </p:sp>
       <p:sp>
         <p:nvSpPr>
-          <p:cNvPr id="15" name="Oval 14"/>
+          <p:cNvPr id="14" name="Oval 13"/>
           <p:cNvSpPr/>
           <p:nvPr/>
         </p:nvSpPr>
@@ -21568,7 +21871,7 @@
       </p:sp>
       <p:sp>
         <p:nvSpPr>
-          <p:cNvPr id="16" name="TextBox 15"/>
+          <p:cNvPr id="15" name="TextBox 14"/>
           <p:cNvSpPr txBox="1"/>
           <p:nvPr/>
         </p:nvSpPr>
@@ -21615,7 +21918,7 @@
       </p:sp>
       <p:sp>
         <p:nvSpPr>
-          <p:cNvPr id="17" name="TextBox 16"/>
+          <p:cNvPr id="16" name="TextBox 15"/>
           <p:cNvSpPr txBox="1"/>
           <p:nvPr/>
         </p:nvSpPr>
@@ -21656,6 +21959,64 @@
                 <a:cs typeface="NanumGothic"/>
               </a:rPr>
               <a:t>정직한 제안</a:t>
+            </a:r>
+          </a:p>
+        </p:txBody>
+      </p:sp>
+      <p:sp>
+        <p:nvSpPr>
+          <p:cNvPr id="17" name="TextBox 16"/>
+          <p:cNvSpPr txBox="1"/>
+          <p:nvPr/>
+        </p:nvSpPr>
+        <p:spPr>
+          <a:xfrm>
+            <a:off x="8988552" y="6419088"/>
+            <a:ext cx="2697480" cy="365760"/>
+          </a:xfrm>
+          <a:prstGeom prst="rect">
+            <a:avLst/>
+          </a:prstGeom>
+          <a:noFill/>
+        </p:spPr>
+        <p:txBody>
+          <a:bodyPr wrap="square" anchor="ctr" lIns="0" rIns="0" tIns="0" bIns="0">
+            <a:spAutoFit/>
+          </a:bodyPr>
+          <a:lstStyle/>
+          <a:p>
+            <a:pPr algn="r">
+              <a:lnSpc>
+                <a:spcPct val="100000"/>
+              </a:lnSpc>
+              <a:spcBef>
+                <a:spcPts val="0"/>
+              </a:spcBef>
+              <a:spcAft>
+                <a:spcPts val="600"/>
+              </a:spcAft>
+            </a:pPr>
+            <a:r>
+              <a:rPr sz="900" b="1">
+                <a:solidFill>
+                  <a:srgbClr val="F43F5E"/>
+                </a:solidFill>
+                <a:latin typeface="NanumGothic"/>
+                <a:ea typeface="NanumGothic"/>
+                <a:cs typeface="NanumGothic"/>
+              </a:rPr>
+              <a:t>Day 5 · 금</a:t>
+            </a:r>
+            <a:r>
+              <a:rPr sz="900" b="1">
+                <a:solidFill>
+                  <a:srgbClr val="64748B"/>
+                </a:solidFill>
+                <a:latin typeface="NanumGothic"/>
+                <a:ea typeface="NanumGothic"/>
+                <a:cs typeface="NanumGothic"/>
+              </a:rPr>
+              <a:t>   ·   8 / 21</a:t>
             </a:r>
           </a:p>
         </p:txBody>
@@ -21959,6 +22320,64 @@
           <a:lstStyle/>
           <a:p>
             <a:pPr algn="ctr"/>
+          </a:p>
+        </p:txBody>
+      </p:sp>
+      <p:sp>
+        <p:nvSpPr>
+          <p:cNvPr id="8" name="TextBox 7"/>
+          <p:cNvSpPr txBox="1"/>
+          <p:nvPr/>
+        </p:nvSpPr>
+        <p:spPr>
+          <a:xfrm>
+            <a:off x="8988552" y="6419088"/>
+            <a:ext cx="2697480" cy="365760"/>
+          </a:xfrm>
+          <a:prstGeom prst="rect">
+            <a:avLst/>
+          </a:prstGeom>
+          <a:noFill/>
+        </p:spPr>
+        <p:txBody>
+          <a:bodyPr wrap="square" anchor="ctr" lIns="0" rIns="0" tIns="0" bIns="0">
+            <a:spAutoFit/>
+          </a:bodyPr>
+          <a:lstStyle/>
+          <a:p>
+            <a:pPr algn="r">
+              <a:lnSpc>
+                <a:spcPct val="100000"/>
+              </a:lnSpc>
+              <a:spcBef>
+                <a:spcPts val="0"/>
+              </a:spcBef>
+              <a:spcAft>
+                <a:spcPts val="600"/>
+              </a:spcAft>
+            </a:pPr>
+            <a:r>
+              <a:rPr sz="900" b="1">
+                <a:solidFill>
+                  <a:srgbClr val="F43F5E"/>
+                </a:solidFill>
+                <a:latin typeface="NanumGothic"/>
+                <a:ea typeface="NanumGothic"/>
+                <a:cs typeface="NanumGothic"/>
+              </a:rPr>
+              <a:t>Day 5 · 금</a:t>
+            </a:r>
+            <a:r>
+              <a:rPr sz="900" b="1">
+                <a:solidFill>
+                  <a:srgbClr val="CBD5E1"/>
+                </a:solidFill>
+                <a:latin typeface="NanumGothic"/>
+                <a:ea typeface="NanumGothic"/>
+                <a:cs typeface="NanumGothic"/>
+              </a:rPr>
+              <a:t>   ·   9 / 21</a:t>
+            </a:r>
           </a:p>
         </p:txBody>
       </p:sp>

--- a/slides/day5.pptx
+++ b/slides/day5.pptx
@@ -4327,7 +4327,7 @@
                 <a:ea typeface="NanumGothic"/>
                 <a:cs typeface="NanumGothic"/>
               </a:rPr>
-              <a:t>AI 에이전트와 응용  ·  원광대학교 5일 교육</a:t>
+              <a:t>신약 개발을 위한 AI Agent 특강</a:t>
             </a:r>
           </a:p>
         </p:txBody>
@@ -5920,7 +5920,7 @@
                 <a:ea typeface="NanumGothic"/>
                 <a:cs typeface="NanumGothic"/>
               </a:rPr>
-              <a:t>AI 에이전트와 응용  ·  원광대학교 5일 교육</a:t>
+              <a:t>신약 개발을 위한 AI Agent 특강</a:t>
             </a:r>
           </a:p>
         </p:txBody>
@@ -6683,7 +6683,7 @@
                 <a:ea typeface="NanumGothic"/>
                 <a:cs typeface="NanumGothic"/>
               </a:rPr>
-              <a:t>AI 에이전트와 응용  ·  원광대학교 5일 교육</a:t>
+              <a:t>신약 개발을 위한 AI Agent 특강</a:t>
             </a:r>
           </a:p>
         </p:txBody>
@@ -7446,7 +7446,7 @@
                 <a:ea typeface="NanumGothic"/>
                 <a:cs typeface="NanumGothic"/>
               </a:rPr>
-              <a:t>AI 에이전트와 응용  ·  원광대학교 5일 교육</a:t>
+              <a:t>신약 개발을 위한 AI Agent 특강</a:t>
             </a:r>
           </a:p>
         </p:txBody>
@@ -8964,7 +8964,7 @@
                 <a:ea typeface="NanumGothic"/>
                 <a:cs typeface="NanumGothic"/>
               </a:rPr>
-              <a:t>AI 에이전트와 응용  ·  원광대학교 5일 교육</a:t>
+              <a:t>신약 개발을 위한 AI Agent 특강</a:t>
             </a:r>
           </a:p>
         </p:txBody>
@@ -9727,7 +9727,7 @@
                 <a:ea typeface="NanumGothic"/>
                 <a:cs typeface="NanumGothic"/>
               </a:rPr>
-              <a:t>AI 에이전트와 응용  ·  원광대학교 5일 교육</a:t>
+              <a:t>신약 개발을 위한 AI Agent 특강</a:t>
             </a:r>
           </a:p>
         </p:txBody>
@@ -10594,7 +10594,7 @@
                 <a:ea typeface="NanumGothic"/>
                 <a:cs typeface="NanumGothic"/>
               </a:rPr>
-              <a:t>AI 에이전트와 응용  ·  원광대학교 5일 교육</a:t>
+              <a:t>신약 개발을 위한 AI Agent 특강</a:t>
             </a:r>
           </a:p>
         </p:txBody>
@@ -12087,7 +12087,7 @@
                 <a:ea typeface="NanumGothic"/>
                 <a:cs typeface="NanumGothic"/>
               </a:rPr>
-              <a:t>AI 에이전트와 응용  ·  원광대학교 5일 교육</a:t>
+              <a:t>신약 개발을 위한 AI Agent 특강</a:t>
             </a:r>
           </a:p>
         </p:txBody>
@@ -12944,7 +12944,7 @@
                 <a:ea typeface="NanumGothic"/>
                 <a:cs typeface="NanumGothic"/>
               </a:rPr>
-              <a:t>AI 에이전트와 응용  ·  원광대학교 5일 교육</a:t>
+              <a:t>신약 개발을 위한 AI Agent 특강</a:t>
             </a:r>
           </a:p>
         </p:txBody>
@@ -13707,7 +13707,7 @@
                 <a:ea typeface="NanumGothic"/>
                 <a:cs typeface="NanumGothic"/>
               </a:rPr>
-              <a:t>AI 에이전트와 응용  ·  원광대학교 5일 교육</a:t>
+              <a:t>신약 개발을 위한 AI Agent 특강</a:t>
             </a:r>
           </a:p>
         </p:txBody>
@@ -14979,7 +14979,7 @@
                 <a:ea typeface="NanumGothic"/>
                 <a:cs typeface="NanumGothic"/>
               </a:rPr>
-              <a:t>AI 에이전트와 응용  ·  원광대학교 5일 교육</a:t>
+              <a:t>신약 개발을 위한 AI Agent 특강</a:t>
             </a:r>
           </a:p>
         </p:txBody>
@@ -15846,7 +15846,7 @@
                 <a:ea typeface="NanumGothic"/>
                 <a:cs typeface="NanumGothic"/>
               </a:rPr>
-              <a:t>AI 에이전트와 응용  ·  원광대학교 5일 교육</a:t>
+              <a:t>신약 개발을 위한 AI Agent 특강</a:t>
             </a:r>
           </a:p>
         </p:txBody>
@@ -16655,7 +16655,7 @@
                 <a:ea typeface="NanumGothic"/>
                 <a:cs typeface="NanumGothic"/>
               </a:rPr>
-              <a:t>AI 에이전트와 응용  ·  원광대학교 5일 교육</a:t>
+              <a:t>신약 개발을 위한 AI Agent 특강</a:t>
             </a:r>
           </a:p>
         </p:txBody>
@@ -18504,7 +18504,7 @@
                 <a:ea typeface="NanumGothic"/>
                 <a:cs typeface="NanumGothic"/>
               </a:rPr>
-              <a:t>AI 에이전트와 응용  ·  원광대학교 5일 교육</a:t>
+              <a:t>신약 개발을 위한 AI Agent 특강</a:t>
             </a:r>
           </a:p>
         </p:txBody>
@@ -19545,7 +19545,7 @@
                 <a:ea typeface="NanumGothic"/>
                 <a:cs typeface="NanumGothic"/>
               </a:rPr>
-              <a:t>AI 에이전트와 응용  ·  원광대학교 5일 교육</a:t>
+              <a:t>신약 개발을 위한 AI Agent 특강</a:t>
             </a:r>
           </a:p>
         </p:txBody>
@@ -20412,7 +20412,7 @@
                 <a:ea typeface="NanumGothic"/>
                 <a:cs typeface="NanumGothic"/>
               </a:rPr>
-              <a:t>AI 에이전트와 응용  ·  원광대학교 5일 교육</a:t>
+              <a:t>신약 개발을 위한 AI Agent 특강</a:t>
             </a:r>
           </a:p>
         </p:txBody>
@@ -21544,7 +21544,7 @@
                 <a:ea typeface="NanumGothic"/>
                 <a:cs typeface="NanumGothic"/>
               </a:rPr>
-              <a:t>AI 에이전트와 응용  ·  원광대학교 5일 교육</a:t>
+              <a:t>신약 개발을 위한 AI Agent 특강</a:t>
             </a:r>
           </a:p>
         </p:txBody>

--- a/slides/day5.pptx
+++ b/slides/day5.pptx
@@ -8615,7 +8615,7 @@
                 <a:ea typeface="NanumGothic"/>
                 <a:cs typeface="NanumGothic"/>
               </a:rPr>
-              <a:t>사람이 방향을 주고, AI가 초안을 빠르게 만든다</a:t>
+              <a:t>사람이 방향을 제시하고 AI가 초안을 신속하게 작성하는 역할 분담이 핵심이다.</a:t>
             </a:r>
           </a:p>
         </p:txBody>
@@ -10245,7 +10245,7 @@
                 <a:ea typeface="NanumGothic"/>
                 <a:cs typeface="NanumGothic"/>
               </a:rPr>
-              <a:t>AI 초안 ≠ 최종본 — 반드시 검토</a:t>
+              <a:t>AI가 작성한 초안은 최종본이 아니므로 반드시 사람의 검토를 거쳐야 한다.</a:t>
             </a:r>
           </a:p>
         </p:txBody>
@@ -15497,7 +15497,7 @@
                 <a:ea typeface="NanumGothic"/>
                 <a:cs typeface="NanumGothic"/>
               </a:rPr>
-              <a:t>수료를 축하합니다</a:t>
+              <a:t>5일 과정을 완주하신 것을 진심으로 축하합니다.</a:t>
             </a:r>
           </a:p>
         </p:txBody>
@@ -20063,7 +20063,7 @@
                 <a:ea typeface="NanumGothic"/>
                 <a:cs typeface="NanumGothic"/>
               </a:rPr>
-              <a:t>버퍼는 팀별 진척에 맞게 유연하게</a:t>
+              <a:t>버퍼 시간은 팀별 진척 상황에 맞추어 유연하게 운영한다.</a:t>
             </a:r>
           </a:p>
         </p:txBody>
